--- a/Proyecto Final/Control de excitador electrodinámico para pruebas de vibraciones.pptx
+++ b/Proyecto Final/Control de excitador electrodinámico para pruebas de vibraciones.pptx
@@ -6,39 +6,44 @@
   </p:sldMasterIdLst>
   <p:sldIdLst>
     <p:sldId id="256" r:id="rId2"/>
-    <p:sldId id="257" r:id="rId3"/>
-    <p:sldId id="258" r:id="rId4"/>
-    <p:sldId id="259" r:id="rId5"/>
-    <p:sldId id="260" r:id="rId6"/>
-    <p:sldId id="261" r:id="rId7"/>
-    <p:sldId id="262" r:id="rId8"/>
-    <p:sldId id="263" r:id="rId9"/>
-    <p:sldId id="264" r:id="rId10"/>
-    <p:sldId id="265" r:id="rId11"/>
-    <p:sldId id="266" r:id="rId12"/>
-    <p:sldId id="267" r:id="rId13"/>
-    <p:sldId id="268" r:id="rId14"/>
-    <p:sldId id="269" r:id="rId15"/>
-    <p:sldId id="270" r:id="rId16"/>
-    <p:sldId id="271" r:id="rId17"/>
-    <p:sldId id="272" r:id="rId18"/>
-    <p:sldId id="273" r:id="rId19"/>
-    <p:sldId id="274" r:id="rId20"/>
-    <p:sldId id="275" r:id="rId21"/>
-    <p:sldId id="276" r:id="rId22"/>
-    <p:sldId id="277" r:id="rId23"/>
-    <p:sldId id="278" r:id="rId24"/>
-    <p:sldId id="279" r:id="rId25"/>
-    <p:sldId id="280" r:id="rId26"/>
-    <p:sldId id="281" r:id="rId27"/>
-    <p:sldId id="282" r:id="rId28"/>
-    <p:sldId id="283" r:id="rId29"/>
-    <p:sldId id="284" r:id="rId30"/>
-    <p:sldId id="285" r:id="rId31"/>
-    <p:sldId id="286" r:id="rId32"/>
-    <p:sldId id="287" r:id="rId33"/>
-    <p:sldId id="288" r:id="rId34"/>
-    <p:sldId id="289" r:id="rId35"/>
+    <p:sldId id="292" r:id="rId3"/>
+    <p:sldId id="257" r:id="rId4"/>
+    <p:sldId id="293" r:id="rId5"/>
+    <p:sldId id="258" r:id="rId6"/>
+    <p:sldId id="291" r:id="rId7"/>
+    <p:sldId id="259" r:id="rId8"/>
+    <p:sldId id="260" r:id="rId9"/>
+    <p:sldId id="261" r:id="rId10"/>
+    <p:sldId id="262" r:id="rId11"/>
+    <p:sldId id="263" r:id="rId12"/>
+    <p:sldId id="264" r:id="rId13"/>
+    <p:sldId id="265" r:id="rId14"/>
+    <p:sldId id="266" r:id="rId15"/>
+    <p:sldId id="294" r:id="rId16"/>
+    <p:sldId id="267" r:id="rId17"/>
+    <p:sldId id="268" r:id="rId18"/>
+    <p:sldId id="295" r:id="rId19"/>
+    <p:sldId id="270" r:id="rId20"/>
+    <p:sldId id="271" r:id="rId21"/>
+    <p:sldId id="272" r:id="rId22"/>
+    <p:sldId id="273" r:id="rId23"/>
+    <p:sldId id="274" r:id="rId24"/>
+    <p:sldId id="275" r:id="rId25"/>
+    <p:sldId id="276" r:id="rId26"/>
+    <p:sldId id="277" r:id="rId27"/>
+    <p:sldId id="290" r:id="rId28"/>
+    <p:sldId id="278" r:id="rId29"/>
+    <p:sldId id="279" r:id="rId30"/>
+    <p:sldId id="280" r:id="rId31"/>
+    <p:sldId id="281" r:id="rId32"/>
+    <p:sldId id="282" r:id="rId33"/>
+    <p:sldId id="283" r:id="rId34"/>
+    <p:sldId id="284" r:id="rId35"/>
+    <p:sldId id="285" r:id="rId36"/>
+    <p:sldId id="286" r:id="rId37"/>
+    <p:sldId id="287" r:id="rId38"/>
+    <p:sldId id="288" r:id="rId39"/>
+    <p:sldId id="289" r:id="rId40"/>
   </p:sldIdLst>
   <p:sldSz cx="12192000" cy="6858000"/>
   <p:notesSz cx="6858000" cy="9144000"/>
@@ -868,7 +873,7 @@
             <a:fld id="{B61BEF0D-F0BB-DE4B-95CE-6DB70DBA9567}" type="datetimeFigureOut">
               <a:rPr lang="en-US" dirty="0"/>
               <a:pPr/>
-              <a:t>8/8/2025</a:t>
+              <a:t>8/18/2025</a:t>
             </a:fld>
             <a:endParaRPr lang="en-US" dirty="0"/>
           </a:p>
@@ -1116,7 +1121,7 @@
             <a:fld id="{B61BEF0D-F0BB-DE4B-95CE-6DB70DBA9567}" type="datetimeFigureOut">
               <a:rPr lang="en-US" dirty="0"/>
               <a:pPr/>
-              <a:t>8/8/2025</a:t>
+              <a:t>8/18/2025</a:t>
             </a:fld>
             <a:endParaRPr lang="en-US" dirty="0"/>
           </a:p>
@@ -1427,7 +1432,7 @@
             <a:fld id="{B61BEF0D-F0BB-DE4B-95CE-6DB70DBA9567}" type="datetimeFigureOut">
               <a:rPr lang="en-US" dirty="0"/>
               <a:pPr/>
-              <a:t>8/8/2025</a:t>
+              <a:t>8/18/2025</a:t>
             </a:fld>
             <a:endParaRPr lang="en-US" dirty="0"/>
           </a:p>
@@ -1765,7 +1770,7 @@
             <a:fld id="{B61BEF0D-F0BB-DE4B-95CE-6DB70DBA9567}" type="datetimeFigureOut">
               <a:rPr lang="en-US" dirty="0"/>
               <a:pPr/>
-              <a:t>8/8/2025</a:t>
+              <a:t>8/18/2025</a:t>
             </a:fld>
             <a:endParaRPr lang="en-US" dirty="0"/>
           </a:p>
@@ -2076,7 +2081,7 @@
             <a:fld id="{B61BEF0D-F0BB-DE4B-95CE-6DB70DBA9567}" type="datetimeFigureOut">
               <a:rPr lang="en-US" dirty="0"/>
               <a:pPr/>
-              <a:t>8/8/2025</a:t>
+              <a:t>8/18/2025</a:t>
             </a:fld>
             <a:endParaRPr lang="en-US" dirty="0"/>
           </a:p>
@@ -2466,7 +2471,7 @@
             <a:fld id="{B61BEF0D-F0BB-DE4B-95CE-6DB70DBA9567}" type="datetimeFigureOut">
               <a:rPr lang="en-US" dirty="0"/>
               <a:pPr/>
-              <a:t>8/8/2025</a:t>
+              <a:t>8/18/2025</a:t>
             </a:fld>
             <a:endParaRPr lang="en-US" dirty="0"/>
           </a:p>
@@ -2632,7 +2637,7 @@
           <a:p>
             <a:fld id="{55C6B4A9-1611-4792-9094-5F34BCA07E0B}" type="datetimeFigureOut">
               <a:rPr lang="en-US" dirty="0"/>
-              <a:t>8/8/2025</a:t>
+              <a:t>8/18/2025</a:t>
             </a:fld>
             <a:endParaRPr lang="en-US" dirty="0"/>
           </a:p>
@@ -2808,7 +2813,7 @@
             <a:fld id="{B61BEF0D-F0BB-DE4B-95CE-6DB70DBA9567}" type="datetimeFigureOut">
               <a:rPr lang="en-US" dirty="0"/>
               <a:pPr/>
-              <a:t>8/8/2025</a:t>
+              <a:t>8/18/2025</a:t>
             </a:fld>
             <a:endParaRPr lang="en-US" dirty="0"/>
           </a:p>
@@ -2981,7 +2986,7 @@
             <a:fld id="{B61BEF0D-F0BB-DE4B-95CE-6DB70DBA9567}" type="datetimeFigureOut">
               <a:rPr lang="en-US" dirty="0"/>
               <a:pPr/>
-              <a:t>8/8/2025</a:t>
+              <a:t>8/18/2025</a:t>
             </a:fld>
             <a:endParaRPr lang="en-US" dirty="0"/>
           </a:p>
@@ -3225,7 +3230,7 @@
             <a:fld id="{B61BEF0D-F0BB-DE4B-95CE-6DB70DBA9567}" type="datetimeFigureOut">
               <a:rPr lang="en-US" dirty="0"/>
               <a:pPr/>
-              <a:t>8/8/2025</a:t>
+              <a:t>8/18/2025</a:t>
             </a:fld>
             <a:endParaRPr lang="en-US" dirty="0"/>
           </a:p>
@@ -3453,7 +3458,7 @@
           <a:p>
             <a:fld id="{EB712588-04B1-427B-82EE-E8DB90309F08}" type="datetimeFigureOut">
               <a:rPr lang="en-US" dirty="0"/>
-              <a:t>8/8/2025</a:t>
+              <a:t>8/18/2025</a:t>
             </a:fld>
             <a:endParaRPr lang="en-US" dirty="0"/>
           </a:p>
@@ -3823,7 +3828,7 @@
             <a:fld id="{B61BEF0D-F0BB-DE4B-95CE-6DB70DBA9567}" type="datetimeFigureOut">
               <a:rPr lang="en-US" dirty="0"/>
               <a:pPr/>
-              <a:t>8/8/2025</a:t>
+              <a:t>8/18/2025</a:t>
             </a:fld>
             <a:endParaRPr lang="en-US" dirty="0"/>
           </a:p>
@@ -3943,7 +3948,7 @@
             <a:fld id="{B61BEF0D-F0BB-DE4B-95CE-6DB70DBA9567}" type="datetimeFigureOut">
               <a:rPr lang="en-US" dirty="0"/>
               <a:pPr/>
-              <a:t>8/8/2025</a:t>
+              <a:t>8/18/2025</a:t>
             </a:fld>
             <a:endParaRPr lang="en-US" dirty="0"/>
           </a:p>
@@ -4035,7 +4040,7 @@
             <a:fld id="{B61BEF0D-F0BB-DE4B-95CE-6DB70DBA9567}" type="datetimeFigureOut">
               <a:rPr lang="en-US" dirty="0"/>
               <a:pPr/>
-              <a:t>8/8/2025</a:t>
+              <a:t>8/18/2025</a:t>
             </a:fld>
             <a:endParaRPr lang="en-US" dirty="0"/>
           </a:p>
@@ -4286,7 +4291,7 @@
           <a:p>
             <a:fld id="{42A54C80-263E-416B-A8E0-580EDEADCBDC}" type="datetimeFigureOut">
               <a:rPr lang="en-US" dirty="0"/>
-              <a:t>8/8/2025</a:t>
+              <a:t>8/18/2025</a:t>
             </a:fld>
             <a:endParaRPr lang="en-US" dirty="0"/>
           </a:p>
@@ -4545,7 +4550,7 @@
             <a:fld id="{B61BEF0D-F0BB-DE4B-95CE-6DB70DBA9567}" type="datetimeFigureOut">
               <a:rPr lang="en-US" dirty="0"/>
               <a:pPr/>
-              <a:t>8/8/2025</a:t>
+              <a:t>8/18/2025</a:t>
             </a:fld>
             <a:endParaRPr lang="en-US" dirty="0"/>
           </a:p>
@@ -5285,7 +5290,7 @@
             <a:fld id="{B61BEF0D-F0BB-DE4B-95CE-6DB70DBA9567}" type="datetimeFigureOut">
               <a:rPr lang="en-US" dirty="0"/>
               <a:pPr/>
-              <a:t>8/8/2025</a:t>
+              <a:t>8/18/2025</a:t>
             </a:fld>
             <a:endParaRPr lang="en-US" dirty="0"/>
           </a:p>
@@ -5947,6 +5952,446 @@
       </p:grpSpPr>
       <p:sp>
         <p:nvSpPr>
+          <p:cNvPr id="6" name="Título 5">
+            <a:extLst>
+              <a:ext uri="{FF2B5EF4-FFF2-40B4-BE49-F238E27FC236}">
+                <a16:creationId xmlns:a16="http://schemas.microsoft.com/office/drawing/2014/main" id="{1718A55E-07E3-466D-9E8B-6E8AA62B4424}"/>
+              </a:ext>
+            </a:extLst>
+          </p:cNvPr>
+          <p:cNvSpPr>
+            <a:spLocks noGrp="1"/>
+          </p:cNvSpPr>
+          <p:nvPr>
+            <p:ph type="title"/>
+          </p:nvPr>
+        </p:nvSpPr>
+        <p:spPr/>
+        <p:txBody>
+          <a:bodyPr/>
+          <a:lstStyle/>
+          <a:p>
+            <a:r>
+              <a:rPr lang="es-ES" dirty="0"/>
+              <a:t>Modelado lineal de la planta</a:t>
+            </a:r>
+            <a:endParaRPr lang="es-AR" dirty="0"/>
+          </a:p>
+        </p:txBody>
+      </p:sp>
+      <p:pic>
+        <p:nvPicPr>
+          <p:cNvPr id="16" name="Marcador de contenido 15">
+            <a:extLst>
+              <a:ext uri="{FF2B5EF4-FFF2-40B4-BE49-F238E27FC236}">
+                <a16:creationId xmlns:a16="http://schemas.microsoft.com/office/drawing/2014/main" id="{0B76AC21-542D-46B1-8895-17CB30EB9E6D}"/>
+              </a:ext>
+            </a:extLst>
+          </p:cNvPr>
+          <p:cNvPicPr>
+            <a:picLocks noGrp="1" noChangeAspect="1"/>
+          </p:cNvPicPr>
+          <p:nvPr>
+            <p:ph idx="1"/>
+          </p:nvPr>
+        </p:nvPicPr>
+        <p:blipFill>
+          <a:blip r:embed="rId2"/>
+          <a:stretch>
+            <a:fillRect/>
+          </a:stretch>
+        </p:blipFill>
+        <p:spPr>
+          <a:xfrm>
+            <a:off x="3163531" y="1560629"/>
+            <a:ext cx="4858428" cy="543001"/>
+          </a:xfrm>
+        </p:spPr>
+      </p:pic>
+      <p:pic>
+        <p:nvPicPr>
+          <p:cNvPr id="18" name="Imagen 17">
+            <a:extLst>
+              <a:ext uri="{FF2B5EF4-FFF2-40B4-BE49-F238E27FC236}">
+                <a16:creationId xmlns:a16="http://schemas.microsoft.com/office/drawing/2014/main" id="{29C2147A-0A4D-492D-A768-CDC63CFADF84}"/>
+              </a:ext>
+            </a:extLst>
+          </p:cNvPr>
+          <p:cNvPicPr>
+            <a:picLocks noChangeAspect="1"/>
+          </p:cNvPicPr>
+          <p:nvPr/>
+        </p:nvPicPr>
+        <p:blipFill>
+          <a:blip r:embed="rId3"/>
+          <a:stretch>
+            <a:fillRect/>
+          </a:stretch>
+        </p:blipFill>
+        <p:spPr>
+          <a:xfrm>
+            <a:off x="3558873" y="2276860"/>
+            <a:ext cx="4067743" cy="2067213"/>
+          </a:xfrm>
+          <a:prstGeom prst="rect">
+            <a:avLst/>
+          </a:prstGeom>
+        </p:spPr>
+      </p:pic>
+      <p:pic>
+        <p:nvPicPr>
+          <p:cNvPr id="20" name="Imagen 19">
+            <a:extLst>
+              <a:ext uri="{FF2B5EF4-FFF2-40B4-BE49-F238E27FC236}">
+                <a16:creationId xmlns:a16="http://schemas.microsoft.com/office/drawing/2014/main" id="{885687BA-DF3B-478D-BA52-ECEDCE1C3678}"/>
+              </a:ext>
+            </a:extLst>
+          </p:cNvPr>
+          <p:cNvPicPr>
+            <a:picLocks noChangeAspect="1"/>
+          </p:cNvPicPr>
+          <p:nvPr/>
+        </p:nvPicPr>
+        <p:blipFill>
+          <a:blip r:embed="rId4"/>
+          <a:stretch>
+            <a:fillRect/>
+          </a:stretch>
+        </p:blipFill>
+        <p:spPr>
+          <a:xfrm>
+            <a:off x="3849425" y="4517303"/>
+            <a:ext cx="3486637" cy="1933845"/>
+          </a:xfrm>
+          <a:prstGeom prst="rect">
+            <a:avLst/>
+          </a:prstGeom>
+        </p:spPr>
+      </p:pic>
+    </p:spTree>
+    <p:extLst>
+      <p:ext uri="{BB962C8B-B14F-4D97-AF65-F5344CB8AC3E}">
+        <p14:creationId xmlns:p14="http://schemas.microsoft.com/office/powerpoint/2010/main" val="4262677638"/>
+      </p:ext>
+    </p:extLst>
+  </p:cSld>
+  <p:clrMapOvr>
+    <a:masterClrMapping/>
+  </p:clrMapOvr>
+</p:sld>
+</file>
+
+<file path=ppt/slides/slide11.xml><?xml version="1.0" encoding="utf-8"?>
+<p:sld xmlns:a="http://schemas.openxmlformats.org/drawingml/2006/main" xmlns:r="http://schemas.openxmlformats.org/officeDocument/2006/relationships" xmlns:p="http://schemas.openxmlformats.org/presentationml/2006/main">
+  <p:cSld>
+    <p:spTree>
+      <p:nvGrpSpPr>
+        <p:cNvPr id="1" name=""/>
+        <p:cNvGrpSpPr/>
+        <p:nvPr/>
+      </p:nvGrpSpPr>
+      <p:grpSpPr>
+        <a:xfrm>
+          <a:off x="0" y="0"/>
+          <a:ext cx="0" cy="0"/>
+          <a:chOff x="0" y="0"/>
+          <a:chExt cx="0" cy="0"/>
+        </a:xfrm>
+      </p:grpSpPr>
+      <p:sp>
+        <p:nvSpPr>
+          <p:cNvPr id="2" name="Título 1">
+            <a:extLst>
+              <a:ext uri="{FF2B5EF4-FFF2-40B4-BE49-F238E27FC236}">
+                <a16:creationId xmlns:a16="http://schemas.microsoft.com/office/drawing/2014/main" id="{053947EB-2A12-4F67-80DD-5101525CF3B9}"/>
+              </a:ext>
+            </a:extLst>
+          </p:cNvPr>
+          <p:cNvSpPr>
+            <a:spLocks noGrp="1"/>
+          </p:cNvSpPr>
+          <p:nvPr>
+            <p:ph type="title"/>
+          </p:nvPr>
+        </p:nvSpPr>
+        <p:spPr/>
+        <p:txBody>
+          <a:bodyPr/>
+          <a:lstStyle/>
+          <a:p>
+            <a:r>
+              <a:rPr lang="es-ES" dirty="0"/>
+              <a:t>Modelado lineal de la planta</a:t>
+            </a:r>
+            <a:endParaRPr lang="es-AR" dirty="0"/>
+          </a:p>
+        </p:txBody>
+      </p:sp>
+      <p:sp>
+        <p:nvSpPr>
+          <p:cNvPr id="3" name="Marcador de contenido 2">
+            <a:extLst>
+              <a:ext uri="{FF2B5EF4-FFF2-40B4-BE49-F238E27FC236}">
+                <a16:creationId xmlns:a16="http://schemas.microsoft.com/office/drawing/2014/main" id="{FAF68963-1555-40EC-B5F1-8CF535108E92}"/>
+              </a:ext>
+            </a:extLst>
+          </p:cNvPr>
+          <p:cNvSpPr>
+            <a:spLocks noGrp="1"/>
+          </p:cNvSpPr>
+          <p:nvPr>
+            <p:ph idx="1"/>
+          </p:nvPr>
+        </p:nvSpPr>
+        <p:spPr/>
+        <p:txBody>
+          <a:bodyPr/>
+          <a:lstStyle/>
+          <a:p>
+            <a:endParaRPr lang="es-AR" dirty="0"/>
+          </a:p>
+        </p:txBody>
+      </p:sp>
+      <p:pic>
+        <p:nvPicPr>
+          <p:cNvPr id="7" name="Imagen 6">
+            <a:extLst>
+              <a:ext uri="{FF2B5EF4-FFF2-40B4-BE49-F238E27FC236}">
+                <a16:creationId xmlns:a16="http://schemas.microsoft.com/office/drawing/2014/main" id="{E2E19C63-78CF-4392-BA54-BB2B7EE5D29A}"/>
+              </a:ext>
+            </a:extLst>
+          </p:cNvPr>
+          <p:cNvPicPr>
+            <a:picLocks noChangeAspect="1"/>
+          </p:cNvPicPr>
+          <p:nvPr/>
+        </p:nvPicPr>
+        <p:blipFill>
+          <a:blip r:embed="rId2"/>
+          <a:stretch>
+            <a:fillRect/>
+          </a:stretch>
+        </p:blipFill>
+        <p:spPr>
+          <a:xfrm>
+            <a:off x="3086791" y="2921957"/>
+            <a:ext cx="4391638" cy="2105319"/>
+          </a:xfrm>
+          <a:prstGeom prst="rect">
+            <a:avLst/>
+          </a:prstGeom>
+        </p:spPr>
+      </p:pic>
+      <p:pic>
+        <p:nvPicPr>
+          <p:cNvPr id="9" name="Imagen 8">
+            <a:extLst>
+              <a:ext uri="{FF2B5EF4-FFF2-40B4-BE49-F238E27FC236}">
+                <a16:creationId xmlns:a16="http://schemas.microsoft.com/office/drawing/2014/main" id="{D274154C-EDE9-4DD3-9FCB-FC21D49D0203}"/>
+              </a:ext>
+            </a:extLst>
+          </p:cNvPr>
+          <p:cNvPicPr>
+            <a:picLocks noChangeAspect="1"/>
+          </p:cNvPicPr>
+          <p:nvPr/>
+        </p:nvPicPr>
+        <p:blipFill>
+          <a:blip r:embed="rId3"/>
+          <a:stretch>
+            <a:fillRect/>
+          </a:stretch>
+        </p:blipFill>
+        <p:spPr>
+          <a:xfrm>
+            <a:off x="3558344" y="2521851"/>
+            <a:ext cx="3448531" cy="400106"/>
+          </a:xfrm>
+          <a:prstGeom prst="rect">
+            <a:avLst/>
+          </a:prstGeom>
+        </p:spPr>
+      </p:pic>
+    </p:spTree>
+    <p:extLst>
+      <p:ext uri="{BB962C8B-B14F-4D97-AF65-F5344CB8AC3E}">
+        <p14:creationId xmlns:p14="http://schemas.microsoft.com/office/powerpoint/2010/main" val="1413790409"/>
+      </p:ext>
+    </p:extLst>
+  </p:cSld>
+  <p:clrMapOvr>
+    <a:masterClrMapping/>
+  </p:clrMapOvr>
+</p:sld>
+</file>
+
+<file path=ppt/slides/slide12.xml><?xml version="1.0" encoding="utf-8"?>
+<p:sld xmlns:a="http://schemas.openxmlformats.org/drawingml/2006/main" xmlns:r="http://schemas.openxmlformats.org/officeDocument/2006/relationships" xmlns:p="http://schemas.openxmlformats.org/presentationml/2006/main">
+  <p:cSld>
+    <p:spTree>
+      <p:nvGrpSpPr>
+        <p:cNvPr id="1" name=""/>
+        <p:cNvGrpSpPr/>
+        <p:nvPr/>
+      </p:nvGrpSpPr>
+      <p:grpSpPr>
+        <a:xfrm>
+          <a:off x="0" y="0"/>
+          <a:ext cx="0" cy="0"/>
+          <a:chOff x="0" y="0"/>
+          <a:chExt cx="0" cy="0"/>
+        </a:xfrm>
+      </p:grpSpPr>
+      <p:sp>
+        <p:nvSpPr>
+          <p:cNvPr id="2" name="Título 1">
+            <a:extLst>
+              <a:ext uri="{FF2B5EF4-FFF2-40B4-BE49-F238E27FC236}">
+                <a16:creationId xmlns:a16="http://schemas.microsoft.com/office/drawing/2014/main" id="{8F8F5C00-A3CC-43BD-94CD-9D768DDB8619}"/>
+              </a:ext>
+            </a:extLst>
+          </p:cNvPr>
+          <p:cNvSpPr>
+            <a:spLocks noGrp="1"/>
+          </p:cNvSpPr>
+          <p:nvPr>
+            <p:ph type="title"/>
+          </p:nvPr>
+        </p:nvSpPr>
+        <p:spPr/>
+        <p:txBody>
+          <a:bodyPr/>
+          <a:lstStyle/>
+          <a:p>
+            <a:r>
+              <a:rPr lang="es-ES" dirty="0"/>
+              <a:t>Modelado lineal de la planta</a:t>
+            </a:r>
+            <a:endParaRPr lang="es-AR" dirty="0"/>
+          </a:p>
+        </p:txBody>
+      </p:sp>
+      <p:pic>
+        <p:nvPicPr>
+          <p:cNvPr id="9" name="Marcador de contenido 8">
+            <a:extLst>
+              <a:ext uri="{FF2B5EF4-FFF2-40B4-BE49-F238E27FC236}">
+                <a16:creationId xmlns:a16="http://schemas.microsoft.com/office/drawing/2014/main" id="{D7C40D05-E4B2-4DCB-9983-D1DE425D2EE4}"/>
+              </a:ext>
+            </a:extLst>
+          </p:cNvPr>
+          <p:cNvPicPr>
+            <a:picLocks noGrp="1" noChangeAspect="1"/>
+          </p:cNvPicPr>
+          <p:nvPr>
+            <p:ph idx="1"/>
+          </p:nvPr>
+        </p:nvPicPr>
+        <p:blipFill>
+          <a:blip r:embed="rId2"/>
+          <a:stretch>
+            <a:fillRect/>
+          </a:stretch>
+        </p:blipFill>
+        <p:spPr>
+          <a:xfrm>
+            <a:off x="2754841" y="1270000"/>
+            <a:ext cx="6177492" cy="4633119"/>
+          </a:xfrm>
+        </p:spPr>
+      </p:pic>
+      <p:pic>
+        <p:nvPicPr>
+          <p:cNvPr id="7" name="Imagen 6">
+            <a:extLst>
+              <a:ext uri="{FF2B5EF4-FFF2-40B4-BE49-F238E27FC236}">
+                <a16:creationId xmlns:a16="http://schemas.microsoft.com/office/drawing/2014/main" id="{D1B664E1-FC85-46A8-8B0E-99104855087C}"/>
+              </a:ext>
+            </a:extLst>
+          </p:cNvPr>
+          <p:cNvPicPr>
+            <a:picLocks noChangeAspect="1"/>
+          </p:cNvPicPr>
+          <p:nvPr/>
+        </p:nvPicPr>
+        <p:blipFill>
+          <a:blip r:embed="rId3"/>
+          <a:stretch>
+            <a:fillRect/>
+          </a:stretch>
+        </p:blipFill>
+        <p:spPr>
+          <a:xfrm>
+            <a:off x="677334" y="2160589"/>
+            <a:ext cx="1571844" cy="962159"/>
+          </a:xfrm>
+          <a:prstGeom prst="rect">
+            <a:avLst/>
+          </a:prstGeom>
+        </p:spPr>
+      </p:pic>
+      <p:pic>
+        <p:nvPicPr>
+          <p:cNvPr id="13" name="Imagen 12">
+            <a:extLst>
+              <a:ext uri="{FF2B5EF4-FFF2-40B4-BE49-F238E27FC236}">
+                <a16:creationId xmlns:a16="http://schemas.microsoft.com/office/drawing/2014/main" id="{C61E7595-9519-44D0-ADF2-A8611BAD54A5}"/>
+              </a:ext>
+            </a:extLst>
+          </p:cNvPr>
+          <p:cNvPicPr>
+            <a:picLocks noChangeAspect="1"/>
+          </p:cNvPicPr>
+          <p:nvPr/>
+        </p:nvPicPr>
+        <p:blipFill>
+          <a:blip r:embed="rId4"/>
+          <a:stretch>
+            <a:fillRect/>
+          </a:stretch>
+        </p:blipFill>
+        <p:spPr>
+          <a:xfrm>
+            <a:off x="3054500" y="6043584"/>
+            <a:ext cx="5439534" cy="409632"/>
+          </a:xfrm>
+          <a:prstGeom prst="rect">
+            <a:avLst/>
+          </a:prstGeom>
+        </p:spPr>
+      </p:pic>
+    </p:spTree>
+    <p:extLst>
+      <p:ext uri="{BB962C8B-B14F-4D97-AF65-F5344CB8AC3E}">
+        <p14:creationId xmlns:p14="http://schemas.microsoft.com/office/powerpoint/2010/main" val="1052121241"/>
+      </p:ext>
+    </p:extLst>
+  </p:cSld>
+  <p:clrMapOvr>
+    <a:masterClrMapping/>
+  </p:clrMapOvr>
+</p:sld>
+</file>
+
+<file path=ppt/slides/slide13.xml><?xml version="1.0" encoding="utf-8"?>
+<p:sld xmlns:a="http://schemas.openxmlformats.org/drawingml/2006/main" xmlns:r="http://schemas.openxmlformats.org/officeDocument/2006/relationships" xmlns:p="http://schemas.openxmlformats.org/presentationml/2006/main">
+  <p:cSld>
+    <p:spTree>
+      <p:nvGrpSpPr>
+        <p:cNvPr id="1" name=""/>
+        <p:cNvGrpSpPr/>
+        <p:nvPr/>
+      </p:nvGrpSpPr>
+      <p:grpSpPr>
+        <a:xfrm>
+          <a:off x="0" y="0"/>
+          <a:ext cx="0" cy="0"/>
+          <a:chOff x="0" y="0"/>
+          <a:chExt cx="0" cy="0"/>
+        </a:xfrm>
+      </p:grpSpPr>
+      <p:sp>
+        <p:nvSpPr>
           <p:cNvPr id="2" name="Título 1">
             <a:extLst>
               <a:ext uri="{FF2B5EF4-FFF2-40B4-BE49-F238E27FC236}">
@@ -6075,7 +6520,7 @@
 </p:sld>
 </file>
 
-<file path=ppt/slides/slide11.xml><?xml version="1.0" encoding="utf-8"?>
+<file path=ppt/slides/slide14.xml><?xml version="1.0" encoding="utf-8"?>
 <p:sld xmlns:a="http://schemas.openxmlformats.org/drawingml/2006/main" xmlns:r="http://schemas.openxmlformats.org/officeDocument/2006/relationships" xmlns:p="http://schemas.openxmlformats.org/presentationml/2006/main">
   <p:cSld>
     <p:spTree>
@@ -6219,7 +6664,91 @@
 </p:sld>
 </file>
 
-<file path=ppt/slides/slide12.xml><?xml version="1.0" encoding="utf-8"?>
+<file path=ppt/slides/slide15.xml><?xml version="1.0" encoding="utf-8"?>
+<p:sld xmlns:a="http://schemas.openxmlformats.org/drawingml/2006/main" xmlns:r="http://schemas.openxmlformats.org/officeDocument/2006/relationships" xmlns:p="http://schemas.openxmlformats.org/presentationml/2006/main">
+  <p:cSld>
+    <p:spTree>
+      <p:nvGrpSpPr>
+        <p:cNvPr id="1" name=""/>
+        <p:cNvGrpSpPr/>
+        <p:nvPr/>
+      </p:nvGrpSpPr>
+      <p:grpSpPr>
+        <a:xfrm>
+          <a:off x="0" y="0"/>
+          <a:ext cx="0" cy="0"/>
+          <a:chOff x="0" y="0"/>
+          <a:chExt cx="0" cy="0"/>
+        </a:xfrm>
+      </p:grpSpPr>
+      <p:sp>
+        <p:nvSpPr>
+          <p:cNvPr id="4" name="Título 3">
+            <a:extLst>
+              <a:ext uri="{FF2B5EF4-FFF2-40B4-BE49-F238E27FC236}">
+                <a16:creationId xmlns:a16="http://schemas.microsoft.com/office/drawing/2014/main" id="{35488FBC-9937-43CA-8E4D-5650561D16A3}"/>
+              </a:ext>
+            </a:extLst>
+          </p:cNvPr>
+          <p:cNvSpPr>
+            <a:spLocks noGrp="1"/>
+          </p:cNvSpPr>
+          <p:nvPr>
+            <p:ph type="ctrTitle"/>
+          </p:nvPr>
+        </p:nvSpPr>
+        <p:spPr/>
+        <p:txBody>
+          <a:bodyPr/>
+          <a:lstStyle/>
+          <a:p>
+            <a:r>
+              <a:rPr lang="es-ES"/>
+              <a:t>No linealidades de la planta</a:t>
+            </a:r>
+            <a:endParaRPr lang="es-AR"/>
+          </a:p>
+        </p:txBody>
+      </p:sp>
+      <p:sp>
+        <p:nvSpPr>
+          <p:cNvPr id="5" name="Subtítulo 4">
+            <a:extLst>
+              <a:ext uri="{FF2B5EF4-FFF2-40B4-BE49-F238E27FC236}">
+                <a16:creationId xmlns:a16="http://schemas.microsoft.com/office/drawing/2014/main" id="{BCB9F6C3-F6F7-4CF4-AB0C-74B867D6BBC7}"/>
+              </a:ext>
+            </a:extLst>
+          </p:cNvPr>
+          <p:cNvSpPr>
+            <a:spLocks noGrp="1"/>
+          </p:cNvSpPr>
+          <p:nvPr>
+            <p:ph type="subTitle" idx="1"/>
+          </p:nvPr>
+        </p:nvSpPr>
+        <p:spPr/>
+        <p:txBody>
+          <a:bodyPr/>
+          <a:lstStyle/>
+          <a:p>
+            <a:endParaRPr lang="es-AR"/>
+          </a:p>
+        </p:txBody>
+      </p:sp>
+    </p:spTree>
+    <p:extLst>
+      <p:ext uri="{BB962C8B-B14F-4D97-AF65-F5344CB8AC3E}">
+        <p14:creationId xmlns:p14="http://schemas.microsoft.com/office/powerpoint/2010/main" val="2569011033"/>
+      </p:ext>
+    </p:extLst>
+  </p:cSld>
+  <p:clrMapOvr>
+    <a:masterClrMapping/>
+  </p:clrMapOvr>
+</p:sld>
+</file>
+
+<file path=ppt/slides/slide16.xml><?xml version="1.0" encoding="utf-8"?>
 <p:sld xmlns:a="http://schemas.openxmlformats.org/drawingml/2006/main" xmlns:r="http://schemas.openxmlformats.org/officeDocument/2006/relationships" xmlns:p="http://schemas.openxmlformats.org/presentationml/2006/main">
   <p:cSld>
     <p:spTree>
@@ -6392,7 +6921,7 @@
 </p:sld>
 </file>
 
-<file path=ppt/slides/slide13.xml><?xml version="1.0" encoding="utf-8"?>
+<file path=ppt/slides/slide17.xml><?xml version="1.0" encoding="utf-8"?>
 <p:sld xmlns:a="http://schemas.openxmlformats.org/drawingml/2006/main" xmlns:r="http://schemas.openxmlformats.org/officeDocument/2006/relationships" xmlns:p="http://schemas.openxmlformats.org/presentationml/2006/main">
   <p:cSld>
     <p:spTree>
@@ -6476,7 +7005,7 @@
 </p:sld>
 </file>
 
-<file path=ppt/slides/slide14.xml><?xml version="1.0" encoding="utf-8"?>
+<file path=ppt/slides/slide18.xml><?xml version="1.0" encoding="utf-8"?>
 <p:sld xmlns:a="http://schemas.openxmlformats.org/drawingml/2006/main" xmlns:r="http://schemas.openxmlformats.org/officeDocument/2006/relationships" xmlns:p="http://schemas.openxmlformats.org/presentationml/2006/main">
   <p:cSld>
     <p:spTree>
@@ -6495,18 +7024,18 @@
       </p:grpSpPr>
       <p:sp>
         <p:nvSpPr>
-          <p:cNvPr id="2" name="Título 1">
-            <a:extLst>
-              <a:ext uri="{FF2B5EF4-FFF2-40B4-BE49-F238E27FC236}">
-                <a16:creationId xmlns:a16="http://schemas.microsoft.com/office/drawing/2014/main" id="{3C5424E2-2C5E-4649-A25F-1D376F4B5935}"/>
-              </a:ext>
-            </a:extLst>
-          </p:cNvPr>
-          <p:cNvSpPr>
-            <a:spLocks noGrp="1"/>
-          </p:cNvSpPr>
-          <p:nvPr>
-            <p:ph type="title"/>
+          <p:cNvPr id="4" name="Título 3">
+            <a:extLst>
+              <a:ext uri="{FF2B5EF4-FFF2-40B4-BE49-F238E27FC236}">
+                <a16:creationId xmlns:a16="http://schemas.microsoft.com/office/drawing/2014/main" id="{2C4816FC-45F3-4D2A-8044-B4ACA9B6ADBD}"/>
+              </a:ext>
+            </a:extLst>
+          </p:cNvPr>
+          <p:cNvSpPr>
+            <a:spLocks noGrp="1"/>
+          </p:cNvSpPr>
+          <p:nvPr>
+            <p:ph type="ctrTitle"/>
           </p:nvPr>
         </p:nvSpPr>
         <p:spPr/>
@@ -6521,99 +7050,35 @@
           </a:p>
         </p:txBody>
       </p:sp>
-      <p:pic>
-        <p:nvPicPr>
-          <p:cNvPr id="5" name="Marcador de contenido 4">
-            <a:extLst>
-              <a:ext uri="{FF2B5EF4-FFF2-40B4-BE49-F238E27FC236}">
-                <a16:creationId xmlns:a16="http://schemas.microsoft.com/office/drawing/2014/main" id="{E4EC1215-EBD4-4C64-A90B-8F99A08686FC}"/>
-              </a:ext>
-            </a:extLst>
-          </p:cNvPr>
-          <p:cNvPicPr>
-            <a:picLocks noGrp="1" noChangeAspect="1"/>
-          </p:cNvPicPr>
-          <p:nvPr>
-            <p:ph idx="1"/>
-          </p:nvPr>
-        </p:nvPicPr>
-        <p:blipFill>
-          <a:blip r:embed="rId2"/>
-          <a:stretch>
-            <a:fillRect/>
-          </a:stretch>
-        </p:blipFill>
-        <p:spPr>
-          <a:xfrm>
-            <a:off x="590961" y="1270000"/>
-            <a:ext cx="5832376" cy="2001704"/>
-          </a:xfrm>
-        </p:spPr>
-      </p:pic>
-      <p:pic>
-        <p:nvPicPr>
-          <p:cNvPr id="7" name="Imagen 6">
-            <a:extLst>
-              <a:ext uri="{FF2B5EF4-FFF2-40B4-BE49-F238E27FC236}">
-                <a16:creationId xmlns:a16="http://schemas.microsoft.com/office/drawing/2014/main" id="{C7702E43-FBBB-4D7D-AEDF-C335139B32D3}"/>
-              </a:ext>
-            </a:extLst>
-          </p:cNvPr>
-          <p:cNvPicPr>
-            <a:picLocks noChangeAspect="1"/>
-          </p:cNvPicPr>
-          <p:nvPr/>
-        </p:nvPicPr>
-        <p:blipFill>
-          <a:blip r:embed="rId3"/>
-          <a:stretch>
-            <a:fillRect/>
-          </a:stretch>
-        </p:blipFill>
-        <p:spPr>
-          <a:xfrm>
-            <a:off x="590961" y="3361335"/>
-            <a:ext cx="6335009" cy="924054"/>
-          </a:xfrm>
-          <a:prstGeom prst="rect">
-            <a:avLst/>
-          </a:prstGeom>
-        </p:spPr>
-      </p:pic>
-      <p:pic>
-        <p:nvPicPr>
-          <p:cNvPr id="9" name="Imagen 8">
-            <a:extLst>
-              <a:ext uri="{FF2B5EF4-FFF2-40B4-BE49-F238E27FC236}">
-                <a16:creationId xmlns:a16="http://schemas.microsoft.com/office/drawing/2014/main" id="{8B464640-8911-4178-8798-B62F265C1069}"/>
-              </a:ext>
-            </a:extLst>
-          </p:cNvPr>
-          <p:cNvPicPr>
-            <a:picLocks noChangeAspect="1"/>
-          </p:cNvPicPr>
-          <p:nvPr/>
-        </p:nvPicPr>
-        <p:blipFill>
-          <a:blip r:embed="rId4"/>
-          <a:stretch>
-            <a:fillRect/>
-          </a:stretch>
-        </p:blipFill>
-        <p:spPr>
-          <a:xfrm>
-            <a:off x="443791" y="4105937"/>
-            <a:ext cx="7636340" cy="2636681"/>
-          </a:xfrm>
-          <a:prstGeom prst="rect">
-            <a:avLst/>
-          </a:prstGeom>
-        </p:spPr>
-      </p:pic>
+      <p:sp>
+        <p:nvSpPr>
+          <p:cNvPr id="5" name="Subtítulo 4">
+            <a:extLst>
+              <a:ext uri="{FF2B5EF4-FFF2-40B4-BE49-F238E27FC236}">
+                <a16:creationId xmlns:a16="http://schemas.microsoft.com/office/drawing/2014/main" id="{8E5BC93C-307D-482E-997D-142DB62AFB49}"/>
+              </a:ext>
+            </a:extLst>
+          </p:cNvPr>
+          <p:cNvSpPr>
+            <a:spLocks noGrp="1"/>
+          </p:cNvSpPr>
+          <p:nvPr>
+            <p:ph type="subTitle" idx="1"/>
+          </p:nvPr>
+        </p:nvSpPr>
+        <p:spPr/>
+        <p:txBody>
+          <a:bodyPr/>
+          <a:lstStyle/>
+          <a:p>
+            <a:endParaRPr lang="es-AR"/>
+          </a:p>
+        </p:txBody>
+      </p:sp>
     </p:spTree>
     <p:extLst>
       <p:ext uri="{BB962C8B-B14F-4D97-AF65-F5344CB8AC3E}">
-        <p14:creationId xmlns:p14="http://schemas.microsoft.com/office/powerpoint/2010/main" val="4137328744"/>
+        <p14:creationId xmlns:p14="http://schemas.microsoft.com/office/powerpoint/2010/main" val="2484748053"/>
       </p:ext>
     </p:extLst>
   </p:cSld>
@@ -6623,7 +7088,7 @@
 </p:sld>
 </file>
 
-<file path=ppt/slides/slide15.xml><?xml version="1.0" encoding="utf-8"?>
+<file path=ppt/slides/slide19.xml><?xml version="1.0" encoding="utf-8"?>
 <p:sld xmlns:a="http://schemas.openxmlformats.org/drawingml/2006/main" xmlns:r="http://schemas.openxmlformats.org/officeDocument/2006/relationships" xmlns:p="http://schemas.openxmlformats.org/presentationml/2006/main">
   <p:cSld>
     <p:spTree>
@@ -6740,7 +7205,90 @@
 </p:sld>
 </file>
 
-<file path=ppt/slides/slide16.xml><?xml version="1.0" encoding="utf-8"?>
+<file path=ppt/slides/slide2.xml><?xml version="1.0" encoding="utf-8"?>
+<p:sld xmlns:a="http://schemas.openxmlformats.org/drawingml/2006/main" xmlns:r="http://schemas.openxmlformats.org/officeDocument/2006/relationships" xmlns:p="http://schemas.openxmlformats.org/presentationml/2006/main">
+  <p:cSld>
+    <p:spTree>
+      <p:nvGrpSpPr>
+        <p:cNvPr id="1" name=""/>
+        <p:cNvGrpSpPr/>
+        <p:nvPr/>
+      </p:nvGrpSpPr>
+      <p:grpSpPr>
+        <a:xfrm>
+          <a:off x="0" y="0"/>
+          <a:ext cx="0" cy="0"/>
+          <a:chOff x="0" y="0"/>
+          <a:chExt cx="0" cy="0"/>
+        </a:xfrm>
+      </p:grpSpPr>
+      <p:sp>
+        <p:nvSpPr>
+          <p:cNvPr id="4" name="Título 3">
+            <a:extLst>
+              <a:ext uri="{FF2B5EF4-FFF2-40B4-BE49-F238E27FC236}">
+                <a16:creationId xmlns:a16="http://schemas.microsoft.com/office/drawing/2014/main" id="{854421D7-2217-40C6-9939-B599125FF5C1}"/>
+              </a:ext>
+            </a:extLst>
+          </p:cNvPr>
+          <p:cNvSpPr>
+            <a:spLocks noGrp="1"/>
+          </p:cNvSpPr>
+          <p:nvPr>
+            <p:ph type="ctrTitle"/>
+          </p:nvPr>
+        </p:nvSpPr>
+        <p:spPr/>
+        <p:txBody>
+          <a:bodyPr/>
+          <a:lstStyle/>
+          <a:p>
+            <a:r>
+              <a:rPr lang="es-AR" dirty="0"/>
+              <a:t>Motivación</a:t>
+            </a:r>
+          </a:p>
+        </p:txBody>
+      </p:sp>
+      <p:sp>
+        <p:nvSpPr>
+          <p:cNvPr id="5" name="Subtítulo 4">
+            <a:extLst>
+              <a:ext uri="{FF2B5EF4-FFF2-40B4-BE49-F238E27FC236}">
+                <a16:creationId xmlns:a16="http://schemas.microsoft.com/office/drawing/2014/main" id="{5CFA3EAD-47CB-4B2A-B563-8620186D63B6}"/>
+              </a:ext>
+            </a:extLst>
+          </p:cNvPr>
+          <p:cNvSpPr>
+            <a:spLocks noGrp="1"/>
+          </p:cNvSpPr>
+          <p:nvPr>
+            <p:ph type="subTitle" idx="1"/>
+          </p:nvPr>
+        </p:nvSpPr>
+        <p:spPr/>
+        <p:txBody>
+          <a:bodyPr/>
+          <a:lstStyle/>
+          <a:p>
+            <a:endParaRPr lang="es-AR"/>
+          </a:p>
+        </p:txBody>
+      </p:sp>
+    </p:spTree>
+    <p:extLst>
+      <p:ext uri="{BB962C8B-B14F-4D97-AF65-F5344CB8AC3E}">
+        <p14:creationId xmlns:p14="http://schemas.microsoft.com/office/powerpoint/2010/main" val="2656805182"/>
+      </p:ext>
+    </p:extLst>
+  </p:cSld>
+  <p:clrMapOvr>
+    <a:masterClrMapping/>
+  </p:clrMapOvr>
+</p:sld>
+</file>
+
+<file path=ppt/slides/slide20.xml><?xml version="1.0" encoding="utf-8"?>
 <p:sld xmlns:a="http://schemas.openxmlformats.org/drawingml/2006/main" xmlns:r="http://schemas.openxmlformats.org/officeDocument/2006/relationships" xmlns:p="http://schemas.openxmlformats.org/presentationml/2006/main">
   <p:cSld>
     <p:spTree>
@@ -6917,7 +7465,7 @@
 </p:sld>
 </file>
 
-<file path=ppt/slides/slide17.xml><?xml version="1.0" encoding="utf-8"?>
+<file path=ppt/slides/slide21.xml><?xml version="1.0" encoding="utf-8"?>
 <p:sld xmlns:a="http://schemas.openxmlformats.org/drawingml/2006/main" xmlns:r="http://schemas.openxmlformats.org/officeDocument/2006/relationships" xmlns:p="http://schemas.openxmlformats.org/presentationml/2006/main">
   <p:cSld>
     <p:spTree>
@@ -7004,7 +7552,7 @@
 </p:sld>
 </file>
 
-<file path=ppt/slides/slide18.xml><?xml version="1.0" encoding="utf-8"?>
+<file path=ppt/slides/slide22.xml><?xml version="1.0" encoding="utf-8"?>
 <p:sld xmlns:a="http://schemas.openxmlformats.org/drawingml/2006/main" xmlns:r="http://schemas.openxmlformats.org/officeDocument/2006/relationships" xmlns:p="http://schemas.openxmlformats.org/presentationml/2006/main">
   <p:cSld>
     <p:spTree>
@@ -7091,7 +7639,7 @@
 </p:sld>
 </file>
 
-<file path=ppt/slides/slide19.xml><?xml version="1.0" encoding="utf-8"?>
+<file path=ppt/slides/slide23.xml><?xml version="1.0" encoding="utf-8"?>
 <p:sld xmlns:a="http://schemas.openxmlformats.org/drawingml/2006/main" xmlns:r="http://schemas.openxmlformats.org/officeDocument/2006/relationships" xmlns:p="http://schemas.openxmlformats.org/presentationml/2006/main">
   <p:cSld>
     <p:spTree>
@@ -7259,7 +7807,570 @@
 </p:sld>
 </file>
 
-<file path=ppt/slides/slide2.xml><?xml version="1.0" encoding="utf-8"?>
+<file path=ppt/slides/slide24.xml><?xml version="1.0" encoding="utf-8"?>
+<p:sld xmlns:a="http://schemas.openxmlformats.org/drawingml/2006/main" xmlns:r="http://schemas.openxmlformats.org/officeDocument/2006/relationships" xmlns:p="http://schemas.openxmlformats.org/presentationml/2006/main">
+  <p:cSld>
+    <p:spTree>
+      <p:nvGrpSpPr>
+        <p:cNvPr id="1" name=""/>
+        <p:cNvGrpSpPr/>
+        <p:nvPr/>
+      </p:nvGrpSpPr>
+      <p:grpSpPr>
+        <a:xfrm>
+          <a:off x="0" y="0"/>
+          <a:ext cx="0" cy="0"/>
+          <a:chOff x="0" y="0"/>
+          <a:chExt cx="0" cy="0"/>
+        </a:xfrm>
+      </p:grpSpPr>
+      <p:sp>
+        <p:nvSpPr>
+          <p:cNvPr id="2" name="Título 1">
+            <a:extLst>
+              <a:ext uri="{FF2B5EF4-FFF2-40B4-BE49-F238E27FC236}">
+                <a16:creationId xmlns:a16="http://schemas.microsoft.com/office/drawing/2014/main" id="{61B7DABB-5957-4B9A-8692-3ED539078E35}"/>
+              </a:ext>
+            </a:extLst>
+          </p:cNvPr>
+          <p:cNvSpPr>
+            <a:spLocks noGrp="1"/>
+          </p:cNvSpPr>
+          <p:nvPr>
+            <p:ph type="title"/>
+          </p:nvPr>
+        </p:nvSpPr>
+        <p:spPr/>
+        <p:txBody>
+          <a:bodyPr/>
+          <a:lstStyle/>
+          <a:p>
+            <a:r>
+              <a:rPr lang="es-AR" dirty="0"/>
+              <a:t>Sensor acelerómetro</a:t>
+            </a:r>
+          </a:p>
+        </p:txBody>
+      </p:sp>
+      <p:pic>
+        <p:nvPicPr>
+          <p:cNvPr id="5" name="Marcador de contenido 4">
+            <a:extLst>
+              <a:ext uri="{FF2B5EF4-FFF2-40B4-BE49-F238E27FC236}">
+                <a16:creationId xmlns:a16="http://schemas.microsoft.com/office/drawing/2014/main" id="{BA48E45B-1057-45EA-A649-DDE23C070F67}"/>
+              </a:ext>
+            </a:extLst>
+          </p:cNvPr>
+          <p:cNvPicPr>
+            <a:picLocks noGrp="1" noChangeAspect="1"/>
+          </p:cNvPicPr>
+          <p:nvPr>
+            <p:ph idx="1"/>
+          </p:nvPr>
+        </p:nvPicPr>
+        <p:blipFill>
+          <a:blip r:embed="rId2"/>
+          <a:stretch>
+            <a:fillRect/>
+          </a:stretch>
+        </p:blipFill>
+        <p:spPr>
+          <a:xfrm>
+            <a:off x="677334" y="1930400"/>
+            <a:ext cx="9108504" cy="4579296"/>
+          </a:xfrm>
+        </p:spPr>
+      </p:pic>
+    </p:spTree>
+    <p:extLst>
+      <p:ext uri="{BB962C8B-B14F-4D97-AF65-F5344CB8AC3E}">
+        <p14:creationId xmlns:p14="http://schemas.microsoft.com/office/powerpoint/2010/main" val="1291439086"/>
+      </p:ext>
+    </p:extLst>
+  </p:cSld>
+  <p:clrMapOvr>
+    <a:masterClrMapping/>
+  </p:clrMapOvr>
+</p:sld>
+</file>
+
+<file path=ppt/slides/slide25.xml><?xml version="1.0" encoding="utf-8"?>
+<p:sld xmlns:a="http://schemas.openxmlformats.org/drawingml/2006/main" xmlns:r="http://schemas.openxmlformats.org/officeDocument/2006/relationships" xmlns:p="http://schemas.openxmlformats.org/presentationml/2006/main">
+  <p:cSld>
+    <p:spTree>
+      <p:nvGrpSpPr>
+        <p:cNvPr id="1" name=""/>
+        <p:cNvGrpSpPr/>
+        <p:nvPr/>
+      </p:nvGrpSpPr>
+      <p:grpSpPr>
+        <a:xfrm>
+          <a:off x="0" y="0"/>
+          <a:ext cx="0" cy="0"/>
+          <a:chOff x="0" y="0"/>
+          <a:chExt cx="0" cy="0"/>
+        </a:xfrm>
+      </p:grpSpPr>
+      <p:sp>
+        <p:nvSpPr>
+          <p:cNvPr id="2" name="Título 1">
+            <a:extLst>
+              <a:ext uri="{FF2B5EF4-FFF2-40B4-BE49-F238E27FC236}">
+                <a16:creationId xmlns:a16="http://schemas.microsoft.com/office/drawing/2014/main" id="{1C0F815B-07C9-4238-B661-9DEE20ABE3A5}"/>
+              </a:ext>
+            </a:extLst>
+          </p:cNvPr>
+          <p:cNvSpPr>
+            <a:spLocks noGrp="1"/>
+          </p:cNvSpPr>
+          <p:nvPr>
+            <p:ph type="title"/>
+          </p:nvPr>
+        </p:nvSpPr>
+        <p:spPr/>
+        <p:txBody>
+          <a:bodyPr/>
+          <a:lstStyle/>
+          <a:p>
+            <a:r>
+              <a:rPr lang="es-AR" dirty="0"/>
+              <a:t>Filtro </a:t>
+            </a:r>
+            <a:r>
+              <a:rPr lang="es-AR" dirty="0" err="1"/>
+              <a:t>antialiasing</a:t>
+            </a:r>
+            <a:endParaRPr lang="es-AR" dirty="0"/>
+          </a:p>
+        </p:txBody>
+      </p:sp>
+      <p:pic>
+        <p:nvPicPr>
+          <p:cNvPr id="7" name="Marcador de contenido 6">
+            <a:extLst>
+              <a:ext uri="{FF2B5EF4-FFF2-40B4-BE49-F238E27FC236}">
+                <a16:creationId xmlns:a16="http://schemas.microsoft.com/office/drawing/2014/main" id="{0E708E14-98F8-44DC-9C6E-F397461C9FDB}"/>
+              </a:ext>
+            </a:extLst>
+          </p:cNvPr>
+          <p:cNvPicPr>
+            <a:picLocks noGrp="1" noChangeAspect="1"/>
+          </p:cNvPicPr>
+          <p:nvPr>
+            <p:ph idx="1"/>
+          </p:nvPr>
+        </p:nvPicPr>
+        <p:blipFill>
+          <a:blip r:embed="rId2"/>
+          <a:stretch>
+            <a:fillRect/>
+          </a:stretch>
+        </p:blipFill>
+        <p:spPr>
+          <a:xfrm>
+            <a:off x="1450487" y="2103654"/>
+            <a:ext cx="8148019" cy="4754346"/>
+          </a:xfrm>
+        </p:spPr>
+      </p:pic>
+      <p:pic>
+        <p:nvPicPr>
+          <p:cNvPr id="5" name="Imagen 4">
+            <a:extLst>
+              <a:ext uri="{FF2B5EF4-FFF2-40B4-BE49-F238E27FC236}">
+                <a16:creationId xmlns:a16="http://schemas.microsoft.com/office/drawing/2014/main" id="{F124CF79-A712-4EE4-9E32-E24456211EDE}"/>
+              </a:ext>
+            </a:extLst>
+          </p:cNvPr>
+          <p:cNvPicPr>
+            <a:picLocks noChangeAspect="1"/>
+          </p:cNvPicPr>
+          <p:nvPr/>
+        </p:nvPicPr>
+        <p:blipFill>
+          <a:blip r:embed="rId3"/>
+          <a:stretch>
+            <a:fillRect/>
+          </a:stretch>
+        </p:blipFill>
+        <p:spPr>
+          <a:xfrm>
+            <a:off x="1632990" y="1199662"/>
+            <a:ext cx="7783011" cy="1181265"/>
+          </a:xfrm>
+          <a:prstGeom prst="rect">
+            <a:avLst/>
+          </a:prstGeom>
+        </p:spPr>
+      </p:pic>
+    </p:spTree>
+    <p:extLst>
+      <p:ext uri="{BB962C8B-B14F-4D97-AF65-F5344CB8AC3E}">
+        <p14:creationId xmlns:p14="http://schemas.microsoft.com/office/powerpoint/2010/main" val="3555721636"/>
+      </p:ext>
+    </p:extLst>
+  </p:cSld>
+  <p:clrMapOvr>
+    <a:masterClrMapping/>
+  </p:clrMapOvr>
+</p:sld>
+</file>
+
+<file path=ppt/slides/slide26.xml><?xml version="1.0" encoding="utf-8"?>
+<p:sld xmlns:a="http://schemas.openxmlformats.org/drawingml/2006/main" xmlns:r="http://schemas.openxmlformats.org/officeDocument/2006/relationships" xmlns:p="http://schemas.openxmlformats.org/presentationml/2006/main">
+  <p:cSld>
+    <p:spTree>
+      <p:nvGrpSpPr>
+        <p:cNvPr id="1" name=""/>
+        <p:cNvGrpSpPr/>
+        <p:nvPr/>
+      </p:nvGrpSpPr>
+      <p:grpSpPr>
+        <a:xfrm>
+          <a:off x="0" y="0"/>
+          <a:ext cx="0" cy="0"/>
+          <a:chOff x="0" y="0"/>
+          <a:chExt cx="0" cy="0"/>
+        </a:xfrm>
+      </p:grpSpPr>
+      <p:sp>
+        <p:nvSpPr>
+          <p:cNvPr id="2" name="Título 1">
+            <a:extLst>
+              <a:ext uri="{FF2B5EF4-FFF2-40B4-BE49-F238E27FC236}">
+                <a16:creationId xmlns:a16="http://schemas.microsoft.com/office/drawing/2014/main" id="{DA22AE54-6D6C-47D8-902F-A7565AC263C6}"/>
+              </a:ext>
+            </a:extLst>
+          </p:cNvPr>
+          <p:cNvSpPr>
+            <a:spLocks noGrp="1"/>
+          </p:cNvSpPr>
+          <p:nvPr>
+            <p:ph type="title"/>
+          </p:nvPr>
+        </p:nvSpPr>
+        <p:spPr>
+          <a:xfrm>
+            <a:off x="598204" y="3027485"/>
+            <a:ext cx="8596668" cy="1320800"/>
+          </a:xfrm>
+        </p:spPr>
+        <p:txBody>
+          <a:bodyPr/>
+          <a:lstStyle/>
+          <a:p>
+            <a:r>
+              <a:rPr lang="es-AR" dirty="0"/>
+              <a:t>ADC y filtro digital</a:t>
+            </a:r>
+          </a:p>
+        </p:txBody>
+      </p:sp>
+      <p:pic>
+        <p:nvPicPr>
+          <p:cNvPr id="5" name="Marcador de contenido 4">
+            <a:extLst>
+              <a:ext uri="{FF2B5EF4-FFF2-40B4-BE49-F238E27FC236}">
+                <a16:creationId xmlns:a16="http://schemas.microsoft.com/office/drawing/2014/main" id="{02987067-EA3D-4972-8AF3-E37840C210D8}"/>
+              </a:ext>
+            </a:extLst>
+          </p:cNvPr>
+          <p:cNvPicPr>
+            <a:picLocks noGrp="1" noChangeAspect="1"/>
+          </p:cNvPicPr>
+          <p:nvPr>
+            <p:ph idx="1"/>
+          </p:nvPr>
+        </p:nvPicPr>
+        <p:blipFill>
+          <a:blip r:embed="rId2"/>
+          <a:stretch>
+            <a:fillRect/>
+          </a:stretch>
+        </p:blipFill>
+        <p:spPr>
+          <a:xfrm>
+            <a:off x="5054800" y="219440"/>
+            <a:ext cx="6779646" cy="6419120"/>
+          </a:xfrm>
+        </p:spPr>
+      </p:pic>
+    </p:spTree>
+    <p:extLst>
+      <p:ext uri="{BB962C8B-B14F-4D97-AF65-F5344CB8AC3E}">
+        <p14:creationId xmlns:p14="http://schemas.microsoft.com/office/powerpoint/2010/main" val="825621110"/>
+      </p:ext>
+    </p:extLst>
+  </p:cSld>
+  <p:clrMapOvr>
+    <a:masterClrMapping/>
+  </p:clrMapOvr>
+</p:sld>
+</file>
+
+<file path=ppt/slides/slide27.xml><?xml version="1.0" encoding="utf-8"?>
+<p:sld xmlns:a="http://schemas.openxmlformats.org/drawingml/2006/main" xmlns:r="http://schemas.openxmlformats.org/officeDocument/2006/relationships" xmlns:p="http://schemas.openxmlformats.org/presentationml/2006/main">
+  <p:cSld>
+    <p:spTree>
+      <p:nvGrpSpPr>
+        <p:cNvPr id="1" name=""/>
+        <p:cNvGrpSpPr/>
+        <p:nvPr/>
+      </p:nvGrpSpPr>
+      <p:grpSpPr>
+        <a:xfrm>
+          <a:off x="0" y="0"/>
+          <a:ext cx="0" cy="0"/>
+          <a:chOff x="0" y="0"/>
+          <a:chExt cx="0" cy="0"/>
+        </a:xfrm>
+      </p:grpSpPr>
+      <p:sp>
+        <p:nvSpPr>
+          <p:cNvPr id="2" name="Título 1">
+            <a:extLst>
+              <a:ext uri="{FF2B5EF4-FFF2-40B4-BE49-F238E27FC236}">
+                <a16:creationId xmlns:a16="http://schemas.microsoft.com/office/drawing/2014/main" id="{8E79B3FA-05DE-40BC-9351-CAB37E9BCD6D}"/>
+              </a:ext>
+            </a:extLst>
+          </p:cNvPr>
+          <p:cNvSpPr>
+            <a:spLocks noGrp="1"/>
+          </p:cNvSpPr>
+          <p:nvPr>
+            <p:ph type="ctrTitle"/>
+          </p:nvPr>
+        </p:nvSpPr>
+        <p:spPr/>
+        <p:txBody>
+          <a:bodyPr/>
+          <a:lstStyle/>
+          <a:p>
+            <a:r>
+              <a:rPr lang="es-AR" dirty="0"/>
+              <a:t>Resultados</a:t>
+            </a:r>
+          </a:p>
+        </p:txBody>
+      </p:sp>
+      <p:sp>
+        <p:nvSpPr>
+          <p:cNvPr id="4" name="Subtítulo 3">
+            <a:extLst>
+              <a:ext uri="{FF2B5EF4-FFF2-40B4-BE49-F238E27FC236}">
+                <a16:creationId xmlns:a16="http://schemas.microsoft.com/office/drawing/2014/main" id="{8E46BDB6-23C5-4762-81D9-41C1E2F3FACC}"/>
+              </a:ext>
+            </a:extLst>
+          </p:cNvPr>
+          <p:cNvSpPr>
+            <a:spLocks noGrp="1"/>
+          </p:cNvSpPr>
+          <p:nvPr>
+            <p:ph type="subTitle" idx="1"/>
+          </p:nvPr>
+        </p:nvSpPr>
+        <p:spPr/>
+        <p:txBody>
+          <a:bodyPr/>
+          <a:lstStyle/>
+          <a:p>
+            <a:endParaRPr lang="es-AR"/>
+          </a:p>
+        </p:txBody>
+      </p:sp>
+    </p:spTree>
+    <p:extLst>
+      <p:ext uri="{BB962C8B-B14F-4D97-AF65-F5344CB8AC3E}">
+        <p14:creationId xmlns:p14="http://schemas.microsoft.com/office/powerpoint/2010/main" val="853781309"/>
+      </p:ext>
+    </p:extLst>
+  </p:cSld>
+  <p:clrMapOvr>
+    <a:masterClrMapping/>
+  </p:clrMapOvr>
+</p:sld>
+</file>
+
+<file path=ppt/slides/slide28.xml><?xml version="1.0" encoding="utf-8"?>
+<p:sld xmlns:a="http://schemas.openxmlformats.org/drawingml/2006/main" xmlns:r="http://schemas.openxmlformats.org/officeDocument/2006/relationships" xmlns:p="http://schemas.openxmlformats.org/presentationml/2006/main">
+  <p:cSld>
+    <p:spTree>
+      <p:nvGrpSpPr>
+        <p:cNvPr id="1" name=""/>
+        <p:cNvGrpSpPr/>
+        <p:nvPr/>
+      </p:nvGrpSpPr>
+      <p:grpSpPr>
+        <a:xfrm>
+          <a:off x="0" y="0"/>
+          <a:ext cx="0" cy="0"/>
+          <a:chOff x="0" y="0"/>
+          <a:chExt cx="0" cy="0"/>
+        </a:xfrm>
+      </p:grpSpPr>
+      <p:sp>
+        <p:nvSpPr>
+          <p:cNvPr id="2" name="Título 1">
+            <a:extLst>
+              <a:ext uri="{FF2B5EF4-FFF2-40B4-BE49-F238E27FC236}">
+                <a16:creationId xmlns:a16="http://schemas.microsoft.com/office/drawing/2014/main" id="{FC600BA6-CD74-4678-9C88-B464E0429816}"/>
+              </a:ext>
+            </a:extLst>
+          </p:cNvPr>
+          <p:cNvSpPr>
+            <a:spLocks noGrp="1"/>
+          </p:cNvSpPr>
+          <p:nvPr>
+            <p:ph type="title"/>
+          </p:nvPr>
+        </p:nvSpPr>
+        <p:spPr/>
+        <p:txBody>
+          <a:bodyPr/>
+          <a:lstStyle/>
+          <a:p>
+            <a:r>
+              <a:rPr lang="es-AR" dirty="0"/>
+              <a:t>Ensayo seno puro</a:t>
+            </a:r>
+          </a:p>
+        </p:txBody>
+      </p:sp>
+      <p:pic>
+        <p:nvPicPr>
+          <p:cNvPr id="5" name="Marcador de contenido 4">
+            <a:extLst>
+              <a:ext uri="{FF2B5EF4-FFF2-40B4-BE49-F238E27FC236}">
+                <a16:creationId xmlns:a16="http://schemas.microsoft.com/office/drawing/2014/main" id="{74790094-082F-4F7B-8ABC-7968645AB0EB}"/>
+              </a:ext>
+            </a:extLst>
+          </p:cNvPr>
+          <p:cNvPicPr>
+            <a:picLocks noGrp="1" noChangeAspect="1"/>
+          </p:cNvPicPr>
+          <p:nvPr>
+            <p:ph idx="1"/>
+          </p:nvPr>
+        </p:nvPicPr>
+        <p:blipFill>
+          <a:blip r:embed="rId2"/>
+          <a:stretch>
+            <a:fillRect/>
+          </a:stretch>
+        </p:blipFill>
+        <p:spPr>
+          <a:xfrm>
+            <a:off x="1906628" y="1544055"/>
+            <a:ext cx="8378743" cy="4704345"/>
+          </a:xfrm>
+        </p:spPr>
+      </p:pic>
+    </p:spTree>
+    <p:extLst>
+      <p:ext uri="{BB962C8B-B14F-4D97-AF65-F5344CB8AC3E}">
+        <p14:creationId xmlns:p14="http://schemas.microsoft.com/office/powerpoint/2010/main" val="21194991"/>
+      </p:ext>
+    </p:extLst>
+  </p:cSld>
+  <p:clrMapOvr>
+    <a:masterClrMapping/>
+  </p:clrMapOvr>
+</p:sld>
+</file>
+
+<file path=ppt/slides/slide29.xml><?xml version="1.0" encoding="utf-8"?>
+<p:sld xmlns:a="http://schemas.openxmlformats.org/drawingml/2006/main" xmlns:r="http://schemas.openxmlformats.org/officeDocument/2006/relationships" xmlns:p="http://schemas.openxmlformats.org/presentationml/2006/main">
+  <p:cSld>
+    <p:spTree>
+      <p:nvGrpSpPr>
+        <p:cNvPr id="1" name=""/>
+        <p:cNvGrpSpPr/>
+        <p:nvPr/>
+      </p:nvGrpSpPr>
+      <p:grpSpPr>
+        <a:xfrm>
+          <a:off x="0" y="0"/>
+          <a:ext cx="0" cy="0"/>
+          <a:chOff x="0" y="0"/>
+          <a:chExt cx="0" cy="0"/>
+        </a:xfrm>
+      </p:grpSpPr>
+      <p:sp>
+        <p:nvSpPr>
+          <p:cNvPr id="2" name="Título 1">
+            <a:extLst>
+              <a:ext uri="{FF2B5EF4-FFF2-40B4-BE49-F238E27FC236}">
+                <a16:creationId xmlns:a16="http://schemas.microsoft.com/office/drawing/2014/main" id="{8384DD16-3E0C-470B-BB48-5D12D53E0D62}"/>
+              </a:ext>
+            </a:extLst>
+          </p:cNvPr>
+          <p:cNvSpPr>
+            <a:spLocks noGrp="1"/>
+          </p:cNvSpPr>
+          <p:nvPr>
+            <p:ph type="title"/>
+          </p:nvPr>
+        </p:nvSpPr>
+        <p:spPr>
+          <a:xfrm>
+            <a:off x="659749" y="319454"/>
+            <a:ext cx="8596668" cy="1320800"/>
+          </a:xfrm>
+        </p:spPr>
+        <p:txBody>
+          <a:bodyPr/>
+          <a:lstStyle/>
+          <a:p>
+            <a:r>
+              <a:rPr lang="es-AR" dirty="0"/>
+              <a:t>Ensayo seno puro</a:t>
+            </a:r>
+          </a:p>
+        </p:txBody>
+      </p:sp>
+      <p:pic>
+        <p:nvPicPr>
+          <p:cNvPr id="5" name="Marcador de contenido 4">
+            <a:extLst>
+              <a:ext uri="{FF2B5EF4-FFF2-40B4-BE49-F238E27FC236}">
+                <a16:creationId xmlns:a16="http://schemas.microsoft.com/office/drawing/2014/main" id="{7B89F836-B95D-4470-8722-B479F9D4E397}"/>
+              </a:ext>
+            </a:extLst>
+          </p:cNvPr>
+          <p:cNvPicPr>
+            <a:picLocks noGrp="1" noChangeAspect="1"/>
+          </p:cNvPicPr>
+          <p:nvPr>
+            <p:ph idx="1"/>
+          </p:nvPr>
+        </p:nvPicPr>
+        <p:blipFill>
+          <a:blip r:embed="rId2"/>
+          <a:stretch>
+            <a:fillRect/>
+          </a:stretch>
+        </p:blipFill>
+        <p:spPr>
+          <a:xfrm>
+            <a:off x="2445379" y="1120531"/>
+            <a:ext cx="7147028" cy="5628286"/>
+          </a:xfrm>
+        </p:spPr>
+      </p:pic>
+    </p:spTree>
+    <p:extLst>
+      <p:ext uri="{BB962C8B-B14F-4D97-AF65-F5344CB8AC3E}">
+        <p14:creationId xmlns:p14="http://schemas.microsoft.com/office/powerpoint/2010/main" val="1243461608"/>
+      </p:ext>
+    </p:extLst>
+  </p:cSld>
+  <p:clrMapOvr>
+    <a:masterClrMapping/>
+  </p:clrMapOvr>
+</p:sld>
+</file>
+
+<file path=ppt/slides/slide3.xml><?xml version="1.0" encoding="utf-8"?>
 <p:sld xmlns:a="http://schemas.openxmlformats.org/drawingml/2006/main" xmlns:r="http://schemas.openxmlformats.org/officeDocument/2006/relationships" xmlns:p="http://schemas.openxmlformats.org/presentationml/2006/main">
   <p:cSld>
     <p:spTree>
@@ -7376,487 +8487,7 @@
 </p:sld>
 </file>
 
-<file path=ppt/slides/slide20.xml><?xml version="1.0" encoding="utf-8"?>
-<p:sld xmlns:a="http://schemas.openxmlformats.org/drawingml/2006/main" xmlns:r="http://schemas.openxmlformats.org/officeDocument/2006/relationships" xmlns:p="http://schemas.openxmlformats.org/presentationml/2006/main">
-  <p:cSld>
-    <p:spTree>
-      <p:nvGrpSpPr>
-        <p:cNvPr id="1" name=""/>
-        <p:cNvGrpSpPr/>
-        <p:nvPr/>
-      </p:nvGrpSpPr>
-      <p:grpSpPr>
-        <a:xfrm>
-          <a:off x="0" y="0"/>
-          <a:ext cx="0" cy="0"/>
-          <a:chOff x="0" y="0"/>
-          <a:chExt cx="0" cy="0"/>
-        </a:xfrm>
-      </p:grpSpPr>
-      <p:sp>
-        <p:nvSpPr>
-          <p:cNvPr id="2" name="Título 1">
-            <a:extLst>
-              <a:ext uri="{FF2B5EF4-FFF2-40B4-BE49-F238E27FC236}">
-                <a16:creationId xmlns:a16="http://schemas.microsoft.com/office/drawing/2014/main" id="{61B7DABB-5957-4B9A-8692-3ED539078E35}"/>
-              </a:ext>
-            </a:extLst>
-          </p:cNvPr>
-          <p:cNvSpPr>
-            <a:spLocks noGrp="1"/>
-          </p:cNvSpPr>
-          <p:nvPr>
-            <p:ph type="title"/>
-          </p:nvPr>
-        </p:nvSpPr>
-        <p:spPr/>
-        <p:txBody>
-          <a:bodyPr/>
-          <a:lstStyle/>
-          <a:p>
-            <a:r>
-              <a:rPr lang="es-AR" dirty="0"/>
-              <a:t>Sensor acelerómetro</a:t>
-            </a:r>
-          </a:p>
-        </p:txBody>
-      </p:sp>
-      <p:pic>
-        <p:nvPicPr>
-          <p:cNvPr id="5" name="Marcador de contenido 4">
-            <a:extLst>
-              <a:ext uri="{FF2B5EF4-FFF2-40B4-BE49-F238E27FC236}">
-                <a16:creationId xmlns:a16="http://schemas.microsoft.com/office/drawing/2014/main" id="{BA48E45B-1057-45EA-A649-DDE23C070F67}"/>
-              </a:ext>
-            </a:extLst>
-          </p:cNvPr>
-          <p:cNvPicPr>
-            <a:picLocks noGrp="1" noChangeAspect="1"/>
-          </p:cNvPicPr>
-          <p:nvPr>
-            <p:ph idx="1"/>
-          </p:nvPr>
-        </p:nvPicPr>
-        <p:blipFill>
-          <a:blip r:embed="rId2"/>
-          <a:stretch>
-            <a:fillRect/>
-          </a:stretch>
-        </p:blipFill>
-        <p:spPr>
-          <a:xfrm>
-            <a:off x="677334" y="1930400"/>
-            <a:ext cx="9108504" cy="4579296"/>
-          </a:xfrm>
-        </p:spPr>
-      </p:pic>
-    </p:spTree>
-    <p:extLst>
-      <p:ext uri="{BB962C8B-B14F-4D97-AF65-F5344CB8AC3E}">
-        <p14:creationId xmlns:p14="http://schemas.microsoft.com/office/powerpoint/2010/main" val="1291439086"/>
-      </p:ext>
-    </p:extLst>
-  </p:cSld>
-  <p:clrMapOvr>
-    <a:masterClrMapping/>
-  </p:clrMapOvr>
-</p:sld>
-</file>
-
-<file path=ppt/slides/slide21.xml><?xml version="1.0" encoding="utf-8"?>
-<p:sld xmlns:a="http://schemas.openxmlformats.org/drawingml/2006/main" xmlns:r="http://schemas.openxmlformats.org/officeDocument/2006/relationships" xmlns:p="http://schemas.openxmlformats.org/presentationml/2006/main">
-  <p:cSld>
-    <p:spTree>
-      <p:nvGrpSpPr>
-        <p:cNvPr id="1" name=""/>
-        <p:cNvGrpSpPr/>
-        <p:nvPr/>
-      </p:nvGrpSpPr>
-      <p:grpSpPr>
-        <a:xfrm>
-          <a:off x="0" y="0"/>
-          <a:ext cx="0" cy="0"/>
-          <a:chOff x="0" y="0"/>
-          <a:chExt cx="0" cy="0"/>
-        </a:xfrm>
-      </p:grpSpPr>
-      <p:sp>
-        <p:nvSpPr>
-          <p:cNvPr id="2" name="Título 1">
-            <a:extLst>
-              <a:ext uri="{FF2B5EF4-FFF2-40B4-BE49-F238E27FC236}">
-                <a16:creationId xmlns:a16="http://schemas.microsoft.com/office/drawing/2014/main" id="{1C0F815B-07C9-4238-B661-9DEE20ABE3A5}"/>
-              </a:ext>
-            </a:extLst>
-          </p:cNvPr>
-          <p:cNvSpPr>
-            <a:spLocks noGrp="1"/>
-          </p:cNvSpPr>
-          <p:nvPr>
-            <p:ph type="title"/>
-          </p:nvPr>
-        </p:nvSpPr>
-        <p:spPr/>
-        <p:txBody>
-          <a:bodyPr/>
-          <a:lstStyle/>
-          <a:p>
-            <a:r>
-              <a:rPr lang="es-AR" dirty="0"/>
-              <a:t>Filtro </a:t>
-            </a:r>
-            <a:r>
-              <a:rPr lang="es-AR" dirty="0" err="1"/>
-              <a:t>antialiasing</a:t>
-            </a:r>
-            <a:endParaRPr lang="es-AR" dirty="0"/>
-          </a:p>
-        </p:txBody>
-      </p:sp>
-      <p:pic>
-        <p:nvPicPr>
-          <p:cNvPr id="7" name="Marcador de contenido 6">
-            <a:extLst>
-              <a:ext uri="{FF2B5EF4-FFF2-40B4-BE49-F238E27FC236}">
-                <a16:creationId xmlns:a16="http://schemas.microsoft.com/office/drawing/2014/main" id="{0E708E14-98F8-44DC-9C6E-F397461C9FDB}"/>
-              </a:ext>
-            </a:extLst>
-          </p:cNvPr>
-          <p:cNvPicPr>
-            <a:picLocks noGrp="1" noChangeAspect="1"/>
-          </p:cNvPicPr>
-          <p:nvPr>
-            <p:ph idx="1"/>
-          </p:nvPr>
-        </p:nvPicPr>
-        <p:blipFill>
-          <a:blip r:embed="rId2"/>
-          <a:stretch>
-            <a:fillRect/>
-          </a:stretch>
-        </p:blipFill>
-        <p:spPr>
-          <a:xfrm>
-            <a:off x="1450487" y="2103654"/>
-            <a:ext cx="8148019" cy="4754346"/>
-          </a:xfrm>
-        </p:spPr>
-      </p:pic>
-      <p:pic>
-        <p:nvPicPr>
-          <p:cNvPr id="5" name="Imagen 4">
-            <a:extLst>
-              <a:ext uri="{FF2B5EF4-FFF2-40B4-BE49-F238E27FC236}">
-                <a16:creationId xmlns:a16="http://schemas.microsoft.com/office/drawing/2014/main" id="{F124CF79-A712-4EE4-9E32-E24456211EDE}"/>
-              </a:ext>
-            </a:extLst>
-          </p:cNvPr>
-          <p:cNvPicPr>
-            <a:picLocks noChangeAspect="1"/>
-          </p:cNvPicPr>
-          <p:nvPr/>
-        </p:nvPicPr>
-        <p:blipFill>
-          <a:blip r:embed="rId3"/>
-          <a:stretch>
-            <a:fillRect/>
-          </a:stretch>
-        </p:blipFill>
-        <p:spPr>
-          <a:xfrm>
-            <a:off x="1632990" y="1199662"/>
-            <a:ext cx="7783011" cy="1181265"/>
-          </a:xfrm>
-          <a:prstGeom prst="rect">
-            <a:avLst/>
-          </a:prstGeom>
-        </p:spPr>
-      </p:pic>
-    </p:spTree>
-    <p:extLst>
-      <p:ext uri="{BB962C8B-B14F-4D97-AF65-F5344CB8AC3E}">
-        <p14:creationId xmlns:p14="http://schemas.microsoft.com/office/powerpoint/2010/main" val="3555721636"/>
-      </p:ext>
-    </p:extLst>
-  </p:cSld>
-  <p:clrMapOvr>
-    <a:masterClrMapping/>
-  </p:clrMapOvr>
-</p:sld>
-</file>
-
-<file path=ppt/slides/slide22.xml><?xml version="1.0" encoding="utf-8"?>
-<p:sld xmlns:a="http://schemas.openxmlformats.org/drawingml/2006/main" xmlns:r="http://schemas.openxmlformats.org/officeDocument/2006/relationships" xmlns:p="http://schemas.openxmlformats.org/presentationml/2006/main">
-  <p:cSld>
-    <p:spTree>
-      <p:nvGrpSpPr>
-        <p:cNvPr id="1" name=""/>
-        <p:cNvGrpSpPr/>
-        <p:nvPr/>
-      </p:nvGrpSpPr>
-      <p:grpSpPr>
-        <a:xfrm>
-          <a:off x="0" y="0"/>
-          <a:ext cx="0" cy="0"/>
-          <a:chOff x="0" y="0"/>
-          <a:chExt cx="0" cy="0"/>
-        </a:xfrm>
-      </p:grpSpPr>
-      <p:sp>
-        <p:nvSpPr>
-          <p:cNvPr id="2" name="Título 1">
-            <a:extLst>
-              <a:ext uri="{FF2B5EF4-FFF2-40B4-BE49-F238E27FC236}">
-                <a16:creationId xmlns:a16="http://schemas.microsoft.com/office/drawing/2014/main" id="{DA22AE54-6D6C-47D8-902F-A7565AC263C6}"/>
-              </a:ext>
-            </a:extLst>
-          </p:cNvPr>
-          <p:cNvSpPr>
-            <a:spLocks noGrp="1"/>
-          </p:cNvSpPr>
-          <p:nvPr>
-            <p:ph type="title"/>
-          </p:nvPr>
-        </p:nvSpPr>
-        <p:spPr>
-          <a:xfrm>
-            <a:off x="598204" y="3027485"/>
-            <a:ext cx="8596668" cy="1320800"/>
-          </a:xfrm>
-        </p:spPr>
-        <p:txBody>
-          <a:bodyPr/>
-          <a:lstStyle/>
-          <a:p>
-            <a:r>
-              <a:rPr lang="es-AR" dirty="0"/>
-              <a:t>ADC y filtro digital</a:t>
-            </a:r>
-          </a:p>
-        </p:txBody>
-      </p:sp>
-      <p:pic>
-        <p:nvPicPr>
-          <p:cNvPr id="5" name="Marcador de contenido 4">
-            <a:extLst>
-              <a:ext uri="{FF2B5EF4-FFF2-40B4-BE49-F238E27FC236}">
-                <a16:creationId xmlns:a16="http://schemas.microsoft.com/office/drawing/2014/main" id="{02987067-EA3D-4972-8AF3-E37840C210D8}"/>
-              </a:ext>
-            </a:extLst>
-          </p:cNvPr>
-          <p:cNvPicPr>
-            <a:picLocks noGrp="1" noChangeAspect="1"/>
-          </p:cNvPicPr>
-          <p:nvPr>
-            <p:ph idx="1"/>
-          </p:nvPr>
-        </p:nvPicPr>
-        <p:blipFill>
-          <a:blip r:embed="rId2"/>
-          <a:stretch>
-            <a:fillRect/>
-          </a:stretch>
-        </p:blipFill>
-        <p:spPr>
-          <a:xfrm>
-            <a:off x="5054800" y="219440"/>
-            <a:ext cx="6779646" cy="6419120"/>
-          </a:xfrm>
-        </p:spPr>
-      </p:pic>
-    </p:spTree>
-    <p:extLst>
-      <p:ext uri="{BB962C8B-B14F-4D97-AF65-F5344CB8AC3E}">
-        <p14:creationId xmlns:p14="http://schemas.microsoft.com/office/powerpoint/2010/main" val="825621110"/>
-      </p:ext>
-    </p:extLst>
-  </p:cSld>
-  <p:clrMapOvr>
-    <a:masterClrMapping/>
-  </p:clrMapOvr>
-</p:sld>
-</file>
-
-<file path=ppt/slides/slide23.xml><?xml version="1.0" encoding="utf-8"?>
-<p:sld xmlns:a="http://schemas.openxmlformats.org/drawingml/2006/main" xmlns:r="http://schemas.openxmlformats.org/officeDocument/2006/relationships" xmlns:p="http://schemas.openxmlformats.org/presentationml/2006/main">
-  <p:cSld>
-    <p:spTree>
-      <p:nvGrpSpPr>
-        <p:cNvPr id="1" name=""/>
-        <p:cNvGrpSpPr/>
-        <p:nvPr/>
-      </p:nvGrpSpPr>
-      <p:grpSpPr>
-        <a:xfrm>
-          <a:off x="0" y="0"/>
-          <a:ext cx="0" cy="0"/>
-          <a:chOff x="0" y="0"/>
-          <a:chExt cx="0" cy="0"/>
-        </a:xfrm>
-      </p:grpSpPr>
-      <p:sp>
-        <p:nvSpPr>
-          <p:cNvPr id="2" name="Título 1">
-            <a:extLst>
-              <a:ext uri="{FF2B5EF4-FFF2-40B4-BE49-F238E27FC236}">
-                <a16:creationId xmlns:a16="http://schemas.microsoft.com/office/drawing/2014/main" id="{FC600BA6-CD74-4678-9C88-B464E0429816}"/>
-              </a:ext>
-            </a:extLst>
-          </p:cNvPr>
-          <p:cNvSpPr>
-            <a:spLocks noGrp="1"/>
-          </p:cNvSpPr>
-          <p:nvPr>
-            <p:ph type="title"/>
-          </p:nvPr>
-        </p:nvSpPr>
-        <p:spPr/>
-        <p:txBody>
-          <a:bodyPr/>
-          <a:lstStyle/>
-          <a:p>
-            <a:r>
-              <a:rPr lang="es-AR" dirty="0"/>
-              <a:t>Ensayo seno puro</a:t>
-            </a:r>
-          </a:p>
-        </p:txBody>
-      </p:sp>
-      <p:pic>
-        <p:nvPicPr>
-          <p:cNvPr id="5" name="Marcador de contenido 4">
-            <a:extLst>
-              <a:ext uri="{FF2B5EF4-FFF2-40B4-BE49-F238E27FC236}">
-                <a16:creationId xmlns:a16="http://schemas.microsoft.com/office/drawing/2014/main" id="{74790094-082F-4F7B-8ABC-7968645AB0EB}"/>
-              </a:ext>
-            </a:extLst>
-          </p:cNvPr>
-          <p:cNvPicPr>
-            <a:picLocks noGrp="1" noChangeAspect="1"/>
-          </p:cNvPicPr>
-          <p:nvPr>
-            <p:ph idx="1"/>
-          </p:nvPr>
-        </p:nvPicPr>
-        <p:blipFill>
-          <a:blip r:embed="rId2"/>
-          <a:stretch>
-            <a:fillRect/>
-          </a:stretch>
-        </p:blipFill>
-        <p:spPr>
-          <a:xfrm>
-            <a:off x="1906628" y="1544055"/>
-            <a:ext cx="8378743" cy="4704345"/>
-          </a:xfrm>
-        </p:spPr>
-      </p:pic>
-    </p:spTree>
-    <p:extLst>
-      <p:ext uri="{BB962C8B-B14F-4D97-AF65-F5344CB8AC3E}">
-        <p14:creationId xmlns:p14="http://schemas.microsoft.com/office/powerpoint/2010/main" val="21194991"/>
-      </p:ext>
-    </p:extLst>
-  </p:cSld>
-  <p:clrMapOvr>
-    <a:masterClrMapping/>
-  </p:clrMapOvr>
-</p:sld>
-</file>
-
-<file path=ppt/slides/slide24.xml><?xml version="1.0" encoding="utf-8"?>
-<p:sld xmlns:a="http://schemas.openxmlformats.org/drawingml/2006/main" xmlns:r="http://schemas.openxmlformats.org/officeDocument/2006/relationships" xmlns:p="http://schemas.openxmlformats.org/presentationml/2006/main">
-  <p:cSld>
-    <p:spTree>
-      <p:nvGrpSpPr>
-        <p:cNvPr id="1" name=""/>
-        <p:cNvGrpSpPr/>
-        <p:nvPr/>
-      </p:nvGrpSpPr>
-      <p:grpSpPr>
-        <a:xfrm>
-          <a:off x="0" y="0"/>
-          <a:ext cx="0" cy="0"/>
-          <a:chOff x="0" y="0"/>
-          <a:chExt cx="0" cy="0"/>
-        </a:xfrm>
-      </p:grpSpPr>
-      <p:sp>
-        <p:nvSpPr>
-          <p:cNvPr id="2" name="Título 1">
-            <a:extLst>
-              <a:ext uri="{FF2B5EF4-FFF2-40B4-BE49-F238E27FC236}">
-                <a16:creationId xmlns:a16="http://schemas.microsoft.com/office/drawing/2014/main" id="{8384DD16-3E0C-470B-BB48-5D12D53E0D62}"/>
-              </a:ext>
-            </a:extLst>
-          </p:cNvPr>
-          <p:cNvSpPr>
-            <a:spLocks noGrp="1"/>
-          </p:cNvSpPr>
-          <p:nvPr>
-            <p:ph type="title"/>
-          </p:nvPr>
-        </p:nvSpPr>
-        <p:spPr>
-          <a:xfrm>
-            <a:off x="659749" y="319454"/>
-            <a:ext cx="8596668" cy="1320800"/>
-          </a:xfrm>
-        </p:spPr>
-        <p:txBody>
-          <a:bodyPr/>
-          <a:lstStyle/>
-          <a:p>
-            <a:r>
-              <a:rPr lang="es-AR" dirty="0"/>
-              <a:t>Ensayo seno puro</a:t>
-            </a:r>
-          </a:p>
-        </p:txBody>
-      </p:sp>
-      <p:pic>
-        <p:nvPicPr>
-          <p:cNvPr id="5" name="Marcador de contenido 4">
-            <a:extLst>
-              <a:ext uri="{FF2B5EF4-FFF2-40B4-BE49-F238E27FC236}">
-                <a16:creationId xmlns:a16="http://schemas.microsoft.com/office/drawing/2014/main" id="{7B89F836-B95D-4470-8722-B479F9D4E397}"/>
-              </a:ext>
-            </a:extLst>
-          </p:cNvPr>
-          <p:cNvPicPr>
-            <a:picLocks noGrp="1" noChangeAspect="1"/>
-          </p:cNvPicPr>
-          <p:nvPr>
-            <p:ph idx="1"/>
-          </p:nvPr>
-        </p:nvPicPr>
-        <p:blipFill>
-          <a:blip r:embed="rId2"/>
-          <a:stretch>
-            <a:fillRect/>
-          </a:stretch>
-        </p:blipFill>
-        <p:spPr>
-          <a:xfrm>
-            <a:off x="2445379" y="1120531"/>
-            <a:ext cx="7147028" cy="5628286"/>
-          </a:xfrm>
-        </p:spPr>
-      </p:pic>
-    </p:spTree>
-    <p:extLst>
-      <p:ext uri="{BB962C8B-B14F-4D97-AF65-F5344CB8AC3E}">
-        <p14:creationId xmlns:p14="http://schemas.microsoft.com/office/powerpoint/2010/main" val="1243461608"/>
-      </p:ext>
-    </p:extLst>
-  </p:cSld>
-  <p:clrMapOvr>
-    <a:masterClrMapping/>
-  </p:clrMapOvr>
-</p:sld>
-</file>
-
-<file path=ppt/slides/slide25.xml><?xml version="1.0" encoding="utf-8"?>
+<file path=ppt/slides/slide30.xml><?xml version="1.0" encoding="utf-8"?>
 <p:sld xmlns:a="http://schemas.openxmlformats.org/drawingml/2006/main" xmlns:r="http://schemas.openxmlformats.org/officeDocument/2006/relationships" xmlns:p="http://schemas.openxmlformats.org/presentationml/2006/main">
   <p:cSld>
     <p:spTree>
@@ -7968,7 +8599,7 @@
 </p:sld>
 </file>
 
-<file path=ppt/slides/slide26.xml><?xml version="1.0" encoding="utf-8"?>
+<file path=ppt/slides/slide31.xml><?xml version="1.0" encoding="utf-8"?>
 <p:sld xmlns:a="http://schemas.openxmlformats.org/drawingml/2006/main" xmlns:r="http://schemas.openxmlformats.org/officeDocument/2006/relationships" xmlns:p="http://schemas.openxmlformats.org/presentationml/2006/main">
   <p:cSld>
     <p:spTree>
@@ -8052,7 +8683,7 @@
 </p:sld>
 </file>
 
-<file path=ppt/slides/slide27.xml><?xml version="1.0" encoding="utf-8"?>
+<file path=ppt/slides/slide32.xml><?xml version="1.0" encoding="utf-8"?>
 <p:sld xmlns:a="http://schemas.openxmlformats.org/drawingml/2006/main" xmlns:r="http://schemas.openxmlformats.org/officeDocument/2006/relationships" xmlns:p="http://schemas.openxmlformats.org/presentationml/2006/main">
   <p:cSld>
     <p:spTree>
@@ -8192,7 +8823,7 @@
 </p:sld>
 </file>
 
-<file path=ppt/slides/slide28.xml><?xml version="1.0" encoding="utf-8"?>
+<file path=ppt/slides/slide33.xml><?xml version="1.0" encoding="utf-8"?>
 <p:sld xmlns:a="http://schemas.openxmlformats.org/drawingml/2006/main" xmlns:r="http://schemas.openxmlformats.org/officeDocument/2006/relationships" xmlns:p="http://schemas.openxmlformats.org/presentationml/2006/main">
   <p:cSld>
     <p:spTree>
@@ -8279,7 +8910,7 @@
 </p:sld>
 </file>
 
-<file path=ppt/slides/slide29.xml><?xml version="1.0" encoding="utf-8"?>
+<file path=ppt/slides/slide34.xml><?xml version="1.0" encoding="utf-8"?>
 <p:sld xmlns:a="http://schemas.openxmlformats.org/drawingml/2006/main" xmlns:r="http://schemas.openxmlformats.org/officeDocument/2006/relationships" xmlns:p="http://schemas.openxmlformats.org/presentationml/2006/main">
   <p:cSld>
     <p:spTree>
@@ -8392,7 +9023,559 @@
 </p:sld>
 </file>
 
-<file path=ppt/slides/slide3.xml><?xml version="1.0" encoding="utf-8"?>
+<file path=ppt/slides/slide35.xml><?xml version="1.0" encoding="utf-8"?>
+<p:sld xmlns:a="http://schemas.openxmlformats.org/drawingml/2006/main" xmlns:r="http://schemas.openxmlformats.org/officeDocument/2006/relationships" xmlns:p="http://schemas.openxmlformats.org/presentationml/2006/main">
+  <p:cSld>
+    <p:spTree>
+      <p:nvGrpSpPr>
+        <p:cNvPr id="1" name=""/>
+        <p:cNvGrpSpPr/>
+        <p:nvPr/>
+      </p:nvGrpSpPr>
+      <p:grpSpPr>
+        <a:xfrm>
+          <a:off x="0" y="0"/>
+          <a:ext cx="0" cy="0"/>
+          <a:chOff x="0" y="0"/>
+          <a:chExt cx="0" cy="0"/>
+        </a:xfrm>
+      </p:grpSpPr>
+      <p:sp>
+        <p:nvSpPr>
+          <p:cNvPr id="2" name="Título 1">
+            <a:extLst>
+              <a:ext uri="{FF2B5EF4-FFF2-40B4-BE49-F238E27FC236}">
+                <a16:creationId xmlns:a16="http://schemas.microsoft.com/office/drawing/2014/main" id="{A0C125F9-2ABC-4CC2-9A51-8439EDBC3661}"/>
+              </a:ext>
+            </a:extLst>
+          </p:cNvPr>
+          <p:cNvSpPr>
+            <a:spLocks noGrp="1"/>
+          </p:cNvSpPr>
+          <p:nvPr>
+            <p:ph type="title"/>
+          </p:nvPr>
+        </p:nvSpPr>
+        <p:spPr/>
+        <p:txBody>
+          <a:bodyPr/>
+          <a:lstStyle/>
+          <a:p>
+            <a:r>
+              <a:rPr lang="es-AR" dirty="0"/>
+              <a:t>Vibración aleatoria</a:t>
+            </a:r>
+          </a:p>
+        </p:txBody>
+      </p:sp>
+      <p:pic>
+        <p:nvPicPr>
+          <p:cNvPr id="5" name="Marcador de contenido 4">
+            <a:extLst>
+              <a:ext uri="{FF2B5EF4-FFF2-40B4-BE49-F238E27FC236}">
+                <a16:creationId xmlns:a16="http://schemas.microsoft.com/office/drawing/2014/main" id="{9157B69E-261E-4251-A770-6F6205B1FE30}"/>
+              </a:ext>
+            </a:extLst>
+          </p:cNvPr>
+          <p:cNvPicPr>
+            <a:picLocks noGrp="1" noChangeAspect="1"/>
+          </p:cNvPicPr>
+          <p:nvPr>
+            <p:ph idx="1"/>
+          </p:nvPr>
+        </p:nvPicPr>
+        <p:blipFill>
+          <a:blip r:embed="rId2"/>
+          <a:stretch>
+            <a:fillRect/>
+          </a:stretch>
+        </p:blipFill>
+        <p:spPr>
+          <a:xfrm>
+            <a:off x="1749995" y="1332541"/>
+            <a:ext cx="8235821" cy="5147389"/>
+          </a:xfrm>
+        </p:spPr>
+      </p:pic>
+    </p:spTree>
+    <p:extLst>
+      <p:ext uri="{BB962C8B-B14F-4D97-AF65-F5344CB8AC3E}">
+        <p14:creationId xmlns:p14="http://schemas.microsoft.com/office/powerpoint/2010/main" val="1208050012"/>
+      </p:ext>
+    </p:extLst>
+  </p:cSld>
+  <p:clrMapOvr>
+    <a:masterClrMapping/>
+  </p:clrMapOvr>
+</p:sld>
+</file>
+
+<file path=ppt/slides/slide36.xml><?xml version="1.0" encoding="utf-8"?>
+<p:sld xmlns:a="http://schemas.openxmlformats.org/drawingml/2006/main" xmlns:r="http://schemas.openxmlformats.org/officeDocument/2006/relationships" xmlns:p="http://schemas.openxmlformats.org/presentationml/2006/main">
+  <p:cSld>
+    <p:spTree>
+      <p:nvGrpSpPr>
+        <p:cNvPr id="1" name=""/>
+        <p:cNvGrpSpPr/>
+        <p:nvPr/>
+      </p:nvGrpSpPr>
+      <p:grpSpPr>
+        <a:xfrm>
+          <a:off x="0" y="0"/>
+          <a:ext cx="0" cy="0"/>
+          <a:chOff x="0" y="0"/>
+          <a:chExt cx="0" cy="0"/>
+        </a:xfrm>
+      </p:grpSpPr>
+      <p:sp>
+        <p:nvSpPr>
+          <p:cNvPr id="2" name="Título 1">
+            <a:extLst>
+              <a:ext uri="{FF2B5EF4-FFF2-40B4-BE49-F238E27FC236}">
+                <a16:creationId xmlns:a16="http://schemas.microsoft.com/office/drawing/2014/main" id="{E85EBB74-C9E7-4CE5-AA66-84E13DD7B8AF}"/>
+              </a:ext>
+            </a:extLst>
+          </p:cNvPr>
+          <p:cNvSpPr>
+            <a:spLocks noGrp="1"/>
+          </p:cNvSpPr>
+          <p:nvPr>
+            <p:ph type="title"/>
+          </p:nvPr>
+        </p:nvSpPr>
+        <p:spPr/>
+        <p:txBody>
+          <a:bodyPr/>
+          <a:lstStyle/>
+          <a:p>
+            <a:r>
+              <a:rPr lang="es-AR" dirty="0"/>
+              <a:t>Barrido de frecuencias</a:t>
+            </a:r>
+          </a:p>
+        </p:txBody>
+      </p:sp>
+      <p:pic>
+        <p:nvPicPr>
+          <p:cNvPr id="7" name="Marcador de contenido 6">
+            <a:extLst>
+              <a:ext uri="{FF2B5EF4-FFF2-40B4-BE49-F238E27FC236}">
+                <a16:creationId xmlns:a16="http://schemas.microsoft.com/office/drawing/2014/main" id="{BFDD0C74-3BEF-42B5-9743-6C8045D122C9}"/>
+              </a:ext>
+            </a:extLst>
+          </p:cNvPr>
+          <p:cNvPicPr>
+            <a:picLocks noGrp="1" noChangeAspect="1"/>
+          </p:cNvPicPr>
+          <p:nvPr>
+            <p:ph idx="1"/>
+          </p:nvPr>
+        </p:nvPicPr>
+        <p:blipFill>
+          <a:blip r:embed="rId2"/>
+          <a:stretch>
+            <a:fillRect/>
+          </a:stretch>
+        </p:blipFill>
+        <p:spPr>
+          <a:xfrm>
+            <a:off x="2499458" y="2617788"/>
+            <a:ext cx="6073042" cy="4328744"/>
+          </a:xfrm>
+        </p:spPr>
+      </p:pic>
+      <p:pic>
+        <p:nvPicPr>
+          <p:cNvPr id="5" name="Imagen 4">
+            <a:extLst>
+              <a:ext uri="{FF2B5EF4-FFF2-40B4-BE49-F238E27FC236}">
+                <a16:creationId xmlns:a16="http://schemas.microsoft.com/office/drawing/2014/main" id="{CA733A05-0059-47C3-A701-8C3BEAE84686}"/>
+              </a:ext>
+            </a:extLst>
+          </p:cNvPr>
+          <p:cNvPicPr>
+            <a:picLocks noChangeAspect="1"/>
+          </p:cNvPicPr>
+          <p:nvPr/>
+        </p:nvPicPr>
+        <p:blipFill>
+          <a:blip r:embed="rId3"/>
+          <a:stretch>
+            <a:fillRect/>
+          </a:stretch>
+        </p:blipFill>
+        <p:spPr>
+          <a:xfrm>
+            <a:off x="1792929" y="1270000"/>
+            <a:ext cx="7772399" cy="1320800"/>
+          </a:xfrm>
+          <a:prstGeom prst="rect">
+            <a:avLst/>
+          </a:prstGeom>
+        </p:spPr>
+      </p:pic>
+    </p:spTree>
+    <p:extLst>
+      <p:ext uri="{BB962C8B-B14F-4D97-AF65-F5344CB8AC3E}">
+        <p14:creationId xmlns:p14="http://schemas.microsoft.com/office/powerpoint/2010/main" val="2483400178"/>
+      </p:ext>
+    </p:extLst>
+  </p:cSld>
+  <p:clrMapOvr>
+    <a:masterClrMapping/>
+  </p:clrMapOvr>
+</p:sld>
+</file>
+
+<file path=ppt/slides/slide37.xml><?xml version="1.0" encoding="utf-8"?>
+<p:sld xmlns:a="http://schemas.openxmlformats.org/drawingml/2006/main" xmlns:r="http://schemas.openxmlformats.org/officeDocument/2006/relationships" xmlns:p="http://schemas.openxmlformats.org/presentationml/2006/main">
+  <p:cSld>
+    <p:spTree>
+      <p:nvGrpSpPr>
+        <p:cNvPr id="1" name=""/>
+        <p:cNvGrpSpPr/>
+        <p:nvPr/>
+      </p:nvGrpSpPr>
+      <p:grpSpPr>
+        <a:xfrm>
+          <a:off x="0" y="0"/>
+          <a:ext cx="0" cy="0"/>
+          <a:chOff x="0" y="0"/>
+          <a:chExt cx="0" cy="0"/>
+        </a:xfrm>
+      </p:grpSpPr>
+      <p:sp>
+        <p:nvSpPr>
+          <p:cNvPr id="2" name="Título 1">
+            <a:extLst>
+              <a:ext uri="{FF2B5EF4-FFF2-40B4-BE49-F238E27FC236}">
+                <a16:creationId xmlns:a16="http://schemas.microsoft.com/office/drawing/2014/main" id="{4402FDC3-C1DE-401F-9FF1-4840A140B340}"/>
+              </a:ext>
+            </a:extLst>
+          </p:cNvPr>
+          <p:cNvSpPr>
+            <a:spLocks noGrp="1"/>
+          </p:cNvSpPr>
+          <p:nvPr>
+            <p:ph type="title"/>
+          </p:nvPr>
+        </p:nvSpPr>
+        <p:spPr/>
+        <p:txBody>
+          <a:bodyPr/>
+          <a:lstStyle/>
+          <a:p>
+            <a:r>
+              <a:rPr lang="es-AR" dirty="0"/>
+              <a:t>Barrido de frecuencias</a:t>
+            </a:r>
+          </a:p>
+        </p:txBody>
+      </p:sp>
+      <p:pic>
+        <p:nvPicPr>
+          <p:cNvPr id="5" name="Marcador de contenido 4">
+            <a:extLst>
+              <a:ext uri="{FF2B5EF4-FFF2-40B4-BE49-F238E27FC236}">
+                <a16:creationId xmlns:a16="http://schemas.microsoft.com/office/drawing/2014/main" id="{A8815EC7-10D8-4721-BC93-715563470ED8}"/>
+              </a:ext>
+            </a:extLst>
+          </p:cNvPr>
+          <p:cNvPicPr>
+            <a:picLocks noGrp="1" noChangeAspect="1"/>
+          </p:cNvPicPr>
+          <p:nvPr>
+            <p:ph idx="1"/>
+          </p:nvPr>
+        </p:nvPicPr>
+        <p:blipFill>
+          <a:blip r:embed="rId2"/>
+          <a:stretch>
+            <a:fillRect/>
+          </a:stretch>
+        </p:blipFill>
+        <p:spPr>
+          <a:xfrm>
+            <a:off x="1924908" y="1930400"/>
+            <a:ext cx="6972907" cy="4706507"/>
+          </a:xfrm>
+        </p:spPr>
+      </p:pic>
+    </p:spTree>
+    <p:extLst>
+      <p:ext uri="{BB962C8B-B14F-4D97-AF65-F5344CB8AC3E}">
+        <p14:creationId xmlns:p14="http://schemas.microsoft.com/office/powerpoint/2010/main" val="2379047892"/>
+      </p:ext>
+    </p:extLst>
+  </p:cSld>
+  <p:clrMapOvr>
+    <a:masterClrMapping/>
+  </p:clrMapOvr>
+</p:sld>
+</file>
+
+<file path=ppt/slides/slide38.xml><?xml version="1.0" encoding="utf-8"?>
+<p:sld xmlns:a="http://schemas.openxmlformats.org/drawingml/2006/main" xmlns:r="http://schemas.openxmlformats.org/officeDocument/2006/relationships" xmlns:p="http://schemas.openxmlformats.org/presentationml/2006/main">
+  <p:cSld>
+    <p:spTree>
+      <p:nvGrpSpPr>
+        <p:cNvPr id="1" name=""/>
+        <p:cNvGrpSpPr/>
+        <p:nvPr/>
+      </p:nvGrpSpPr>
+      <p:grpSpPr>
+        <a:xfrm>
+          <a:off x="0" y="0"/>
+          <a:ext cx="0" cy="0"/>
+          <a:chOff x="0" y="0"/>
+          <a:chExt cx="0" cy="0"/>
+        </a:xfrm>
+      </p:grpSpPr>
+      <p:sp>
+        <p:nvSpPr>
+          <p:cNvPr id="2" name="Título 1">
+            <a:extLst>
+              <a:ext uri="{FF2B5EF4-FFF2-40B4-BE49-F238E27FC236}">
+                <a16:creationId xmlns:a16="http://schemas.microsoft.com/office/drawing/2014/main" id="{B956DE61-992C-4D9E-A929-387D0E6E0A87}"/>
+              </a:ext>
+            </a:extLst>
+          </p:cNvPr>
+          <p:cNvSpPr>
+            <a:spLocks noGrp="1"/>
+          </p:cNvSpPr>
+          <p:nvPr>
+            <p:ph type="title"/>
+          </p:nvPr>
+        </p:nvSpPr>
+        <p:spPr/>
+        <p:txBody>
+          <a:bodyPr/>
+          <a:lstStyle/>
+          <a:p>
+            <a:r>
+              <a:rPr lang="es-AR" dirty="0"/>
+              <a:t>Conclusiones y posibles mejoras</a:t>
+            </a:r>
+          </a:p>
+        </p:txBody>
+      </p:sp>
+      <p:sp>
+        <p:nvSpPr>
+          <p:cNvPr id="3" name="Marcador de contenido 2">
+            <a:extLst>
+              <a:ext uri="{FF2B5EF4-FFF2-40B4-BE49-F238E27FC236}">
+                <a16:creationId xmlns:a16="http://schemas.microsoft.com/office/drawing/2014/main" id="{C7986D22-3D7D-48C6-B0EA-E77D6DE1F35B}"/>
+              </a:ext>
+            </a:extLst>
+          </p:cNvPr>
+          <p:cNvSpPr>
+            <a:spLocks noGrp="1"/>
+          </p:cNvSpPr>
+          <p:nvPr>
+            <p:ph idx="1"/>
+          </p:nvPr>
+        </p:nvSpPr>
+        <p:spPr/>
+        <p:txBody>
+          <a:bodyPr/>
+          <a:lstStyle/>
+          <a:p>
+            <a:endParaRPr lang="es-AR" dirty="0"/>
+          </a:p>
+        </p:txBody>
+      </p:sp>
+      <p:pic>
+        <p:nvPicPr>
+          <p:cNvPr id="5" name="Imagen 4">
+            <a:extLst>
+              <a:ext uri="{FF2B5EF4-FFF2-40B4-BE49-F238E27FC236}">
+                <a16:creationId xmlns:a16="http://schemas.microsoft.com/office/drawing/2014/main" id="{4F4EEEA0-EC78-4CA7-B423-A928124359A5}"/>
+              </a:ext>
+            </a:extLst>
+          </p:cNvPr>
+          <p:cNvPicPr>
+            <a:picLocks noChangeAspect="1"/>
+          </p:cNvPicPr>
+          <p:nvPr/>
+        </p:nvPicPr>
+        <p:blipFill>
+          <a:blip r:embed="rId2"/>
+          <a:stretch>
+            <a:fillRect/>
+          </a:stretch>
+        </p:blipFill>
+        <p:spPr>
+          <a:xfrm>
+            <a:off x="1225817" y="2204866"/>
+            <a:ext cx="8168204" cy="2722735"/>
+          </a:xfrm>
+          <a:prstGeom prst="rect">
+            <a:avLst/>
+          </a:prstGeom>
+        </p:spPr>
+      </p:pic>
+    </p:spTree>
+    <p:extLst>
+      <p:ext uri="{BB962C8B-B14F-4D97-AF65-F5344CB8AC3E}">
+        <p14:creationId xmlns:p14="http://schemas.microsoft.com/office/powerpoint/2010/main" val="3537097527"/>
+      </p:ext>
+    </p:extLst>
+  </p:cSld>
+  <p:clrMapOvr>
+    <a:masterClrMapping/>
+  </p:clrMapOvr>
+</p:sld>
+</file>
+
+<file path=ppt/slides/slide39.xml><?xml version="1.0" encoding="utf-8"?>
+<p:sld xmlns:a="http://schemas.openxmlformats.org/drawingml/2006/main" xmlns:r="http://schemas.openxmlformats.org/officeDocument/2006/relationships" xmlns:p="http://schemas.openxmlformats.org/presentationml/2006/main">
+  <p:cSld>
+    <p:spTree>
+      <p:nvGrpSpPr>
+        <p:cNvPr id="1" name=""/>
+        <p:cNvGrpSpPr/>
+        <p:nvPr/>
+      </p:nvGrpSpPr>
+      <p:grpSpPr>
+        <a:xfrm>
+          <a:off x="0" y="0"/>
+          <a:ext cx="0" cy="0"/>
+          <a:chOff x="0" y="0"/>
+          <a:chExt cx="0" cy="0"/>
+        </a:xfrm>
+      </p:grpSpPr>
+      <p:sp>
+        <p:nvSpPr>
+          <p:cNvPr id="4" name="Título 3">
+            <a:extLst>
+              <a:ext uri="{FF2B5EF4-FFF2-40B4-BE49-F238E27FC236}">
+                <a16:creationId xmlns:a16="http://schemas.microsoft.com/office/drawing/2014/main" id="{02A53883-E446-42D7-873D-F698C5F0D058}"/>
+              </a:ext>
+            </a:extLst>
+          </p:cNvPr>
+          <p:cNvSpPr>
+            <a:spLocks noGrp="1"/>
+          </p:cNvSpPr>
+          <p:nvPr>
+            <p:ph type="title"/>
+          </p:nvPr>
+        </p:nvSpPr>
+        <p:spPr>
+          <a:xfrm>
+            <a:off x="4334934" y="2992315"/>
+            <a:ext cx="8596668" cy="1320800"/>
+          </a:xfrm>
+        </p:spPr>
+        <p:txBody>
+          <a:bodyPr>
+            <a:normAutofit/>
+          </a:bodyPr>
+          <a:lstStyle/>
+          <a:p>
+            <a:r>
+              <a:rPr lang="es-AR" sz="5400" dirty="0"/>
+              <a:t>Gracias</a:t>
+            </a:r>
+          </a:p>
+        </p:txBody>
+      </p:sp>
+    </p:spTree>
+    <p:extLst>
+      <p:ext uri="{BB962C8B-B14F-4D97-AF65-F5344CB8AC3E}">
+        <p14:creationId xmlns:p14="http://schemas.microsoft.com/office/powerpoint/2010/main" val="537846595"/>
+      </p:ext>
+    </p:extLst>
+  </p:cSld>
+  <p:clrMapOvr>
+    <a:masterClrMapping/>
+  </p:clrMapOvr>
+</p:sld>
+</file>
+
+<file path=ppt/slides/slide4.xml><?xml version="1.0" encoding="utf-8"?>
+<p:sld xmlns:a="http://schemas.openxmlformats.org/drawingml/2006/main" xmlns:r="http://schemas.openxmlformats.org/officeDocument/2006/relationships" xmlns:p="http://schemas.openxmlformats.org/presentationml/2006/main">
+  <p:cSld>
+    <p:spTree>
+      <p:nvGrpSpPr>
+        <p:cNvPr id="1" name=""/>
+        <p:cNvGrpSpPr/>
+        <p:nvPr/>
+      </p:nvGrpSpPr>
+      <p:grpSpPr>
+        <a:xfrm>
+          <a:off x="0" y="0"/>
+          <a:ext cx="0" cy="0"/>
+          <a:chOff x="0" y="0"/>
+          <a:chExt cx="0" cy="0"/>
+        </a:xfrm>
+      </p:grpSpPr>
+      <p:sp>
+        <p:nvSpPr>
+          <p:cNvPr id="4" name="Título 3">
+            <a:extLst>
+              <a:ext uri="{FF2B5EF4-FFF2-40B4-BE49-F238E27FC236}">
+                <a16:creationId xmlns:a16="http://schemas.microsoft.com/office/drawing/2014/main" id="{68EABB57-37F7-41EA-BAA1-0D5FDE169D0F}"/>
+              </a:ext>
+            </a:extLst>
+          </p:cNvPr>
+          <p:cNvSpPr>
+            <a:spLocks noGrp="1"/>
+          </p:cNvSpPr>
+          <p:nvPr>
+            <p:ph type="ctrTitle"/>
+          </p:nvPr>
+        </p:nvSpPr>
+        <p:spPr/>
+        <p:txBody>
+          <a:bodyPr/>
+          <a:lstStyle/>
+          <a:p>
+            <a:r>
+              <a:rPr lang="es-AR" dirty="0"/>
+              <a:t>Objetivo</a:t>
+            </a:r>
+          </a:p>
+        </p:txBody>
+      </p:sp>
+      <p:sp>
+        <p:nvSpPr>
+          <p:cNvPr id="5" name="Subtítulo 4">
+            <a:extLst>
+              <a:ext uri="{FF2B5EF4-FFF2-40B4-BE49-F238E27FC236}">
+                <a16:creationId xmlns:a16="http://schemas.microsoft.com/office/drawing/2014/main" id="{18FDFDF8-8A43-497F-8AE0-9C355EB64694}"/>
+              </a:ext>
+            </a:extLst>
+          </p:cNvPr>
+          <p:cNvSpPr>
+            <a:spLocks noGrp="1"/>
+          </p:cNvSpPr>
+          <p:nvPr>
+            <p:ph type="subTitle" idx="1"/>
+          </p:nvPr>
+        </p:nvSpPr>
+        <p:spPr/>
+        <p:txBody>
+          <a:bodyPr/>
+          <a:lstStyle/>
+          <a:p>
+            <a:endParaRPr lang="es-AR"/>
+          </a:p>
+        </p:txBody>
+      </p:sp>
+    </p:spTree>
+    <p:extLst>
+      <p:ext uri="{BB962C8B-B14F-4D97-AF65-F5344CB8AC3E}">
+        <p14:creationId xmlns:p14="http://schemas.microsoft.com/office/powerpoint/2010/main" val="775121631"/>
+      </p:ext>
+    </p:extLst>
+  </p:cSld>
+  <p:clrMapOvr>
+    <a:masterClrMapping/>
+  </p:clrMapOvr>
+</p:sld>
+</file>
+
+<file path=ppt/slides/slide5.xml><?xml version="1.0" encoding="utf-8"?>
 <p:sld xmlns:a="http://schemas.openxmlformats.org/drawingml/2006/main" xmlns:r="http://schemas.openxmlformats.org/officeDocument/2006/relationships" xmlns:p="http://schemas.openxmlformats.org/presentationml/2006/main">
   <p:cSld>
     <p:spTree>
@@ -8599,7 +9782,7 @@
 </p:sld>
 </file>
 
-<file path=ppt/slides/slide30.xml><?xml version="1.0" encoding="utf-8"?>
+<file path=ppt/slides/slide6.xml><?xml version="1.0" encoding="utf-8"?>
 <p:sld xmlns:a="http://schemas.openxmlformats.org/drawingml/2006/main" xmlns:r="http://schemas.openxmlformats.org/officeDocument/2006/relationships" xmlns:p="http://schemas.openxmlformats.org/presentationml/2006/main">
   <p:cSld>
     <p:spTree>
@@ -8618,18 +9801,18 @@
       </p:grpSpPr>
       <p:sp>
         <p:nvSpPr>
-          <p:cNvPr id="2" name="Título 1">
-            <a:extLst>
-              <a:ext uri="{FF2B5EF4-FFF2-40B4-BE49-F238E27FC236}">
-                <a16:creationId xmlns:a16="http://schemas.microsoft.com/office/drawing/2014/main" id="{A0C125F9-2ABC-4CC2-9A51-8439EDBC3661}"/>
-              </a:ext>
-            </a:extLst>
-          </p:cNvPr>
-          <p:cNvSpPr>
-            <a:spLocks noGrp="1"/>
-          </p:cNvSpPr>
-          <p:nvPr>
-            <p:ph type="title"/>
+          <p:cNvPr id="4" name="Título 3">
+            <a:extLst>
+              <a:ext uri="{FF2B5EF4-FFF2-40B4-BE49-F238E27FC236}">
+                <a16:creationId xmlns:a16="http://schemas.microsoft.com/office/drawing/2014/main" id="{802CFC03-6BBB-49B8-B38F-7E61C6024B3F}"/>
+              </a:ext>
+            </a:extLst>
+          </p:cNvPr>
+          <p:cNvSpPr>
+            <a:spLocks noGrp="1"/>
+          </p:cNvSpPr>
+          <p:nvPr>
+            <p:ph type="ctrTitle"/>
           </p:nvPr>
         </p:nvSpPr>
         <p:spPr/>
@@ -8638,45 +9821,42 @@
           <a:lstStyle/>
           <a:p>
             <a:r>
-              <a:rPr lang="es-AR" dirty="0"/>
-              <a:t>Vibración aleatoria</a:t>
-            </a:r>
-          </a:p>
-        </p:txBody>
-      </p:sp>
-      <p:pic>
-        <p:nvPicPr>
-          <p:cNvPr id="5" name="Marcador de contenido 4">
-            <a:extLst>
-              <a:ext uri="{FF2B5EF4-FFF2-40B4-BE49-F238E27FC236}">
-                <a16:creationId xmlns:a16="http://schemas.microsoft.com/office/drawing/2014/main" id="{9157B69E-261E-4251-A770-6F6205B1FE30}"/>
-              </a:ext>
-            </a:extLst>
-          </p:cNvPr>
-          <p:cNvPicPr>
-            <a:picLocks noGrp="1" noChangeAspect="1"/>
-          </p:cNvPicPr>
-          <p:nvPr>
-            <p:ph idx="1"/>
-          </p:nvPr>
-        </p:nvPicPr>
-        <p:blipFill>
-          <a:blip r:embed="rId2"/>
-          <a:stretch>
-            <a:fillRect/>
-          </a:stretch>
-        </p:blipFill>
-        <p:spPr>
-          <a:xfrm>
-            <a:off x="1749995" y="1332541"/>
-            <a:ext cx="8235821" cy="5147389"/>
-          </a:xfrm>
-        </p:spPr>
-      </p:pic>
+              <a:rPr lang="es-ES" dirty="0"/>
+              <a:t>Modelado lineal de la planta</a:t>
+            </a:r>
+            <a:endParaRPr lang="es-AR" dirty="0"/>
+          </a:p>
+        </p:txBody>
+      </p:sp>
+      <p:sp>
+        <p:nvSpPr>
+          <p:cNvPr id="5" name="Subtítulo 4">
+            <a:extLst>
+              <a:ext uri="{FF2B5EF4-FFF2-40B4-BE49-F238E27FC236}">
+                <a16:creationId xmlns:a16="http://schemas.microsoft.com/office/drawing/2014/main" id="{B2D52636-ED88-4DE3-A96C-5920B9FB8DF7}"/>
+              </a:ext>
+            </a:extLst>
+          </p:cNvPr>
+          <p:cNvSpPr>
+            <a:spLocks noGrp="1"/>
+          </p:cNvSpPr>
+          <p:nvPr>
+            <p:ph type="subTitle" idx="1"/>
+          </p:nvPr>
+        </p:nvSpPr>
+        <p:spPr/>
+        <p:txBody>
+          <a:bodyPr/>
+          <a:lstStyle/>
+          <a:p>
+            <a:endParaRPr lang="es-AR"/>
+          </a:p>
+        </p:txBody>
+      </p:sp>
     </p:spTree>
     <p:extLst>
       <p:ext uri="{BB962C8B-B14F-4D97-AF65-F5344CB8AC3E}">
-        <p14:creationId xmlns:p14="http://schemas.microsoft.com/office/powerpoint/2010/main" val="1208050012"/>
+        <p14:creationId xmlns:p14="http://schemas.microsoft.com/office/powerpoint/2010/main" val="42322004"/>
       </p:ext>
     </p:extLst>
   </p:cSld>
@@ -8686,389 +9866,7 @@
 </p:sld>
 </file>
 
-<file path=ppt/slides/slide31.xml><?xml version="1.0" encoding="utf-8"?>
-<p:sld xmlns:a="http://schemas.openxmlformats.org/drawingml/2006/main" xmlns:r="http://schemas.openxmlformats.org/officeDocument/2006/relationships" xmlns:p="http://schemas.openxmlformats.org/presentationml/2006/main">
-  <p:cSld>
-    <p:spTree>
-      <p:nvGrpSpPr>
-        <p:cNvPr id="1" name=""/>
-        <p:cNvGrpSpPr/>
-        <p:nvPr/>
-      </p:nvGrpSpPr>
-      <p:grpSpPr>
-        <a:xfrm>
-          <a:off x="0" y="0"/>
-          <a:ext cx="0" cy="0"/>
-          <a:chOff x="0" y="0"/>
-          <a:chExt cx="0" cy="0"/>
-        </a:xfrm>
-      </p:grpSpPr>
-      <p:sp>
-        <p:nvSpPr>
-          <p:cNvPr id="2" name="Título 1">
-            <a:extLst>
-              <a:ext uri="{FF2B5EF4-FFF2-40B4-BE49-F238E27FC236}">
-                <a16:creationId xmlns:a16="http://schemas.microsoft.com/office/drawing/2014/main" id="{E85EBB74-C9E7-4CE5-AA66-84E13DD7B8AF}"/>
-              </a:ext>
-            </a:extLst>
-          </p:cNvPr>
-          <p:cNvSpPr>
-            <a:spLocks noGrp="1"/>
-          </p:cNvSpPr>
-          <p:nvPr>
-            <p:ph type="title"/>
-          </p:nvPr>
-        </p:nvSpPr>
-        <p:spPr/>
-        <p:txBody>
-          <a:bodyPr/>
-          <a:lstStyle/>
-          <a:p>
-            <a:r>
-              <a:rPr lang="es-AR" dirty="0"/>
-              <a:t>Barrido de frecuencias</a:t>
-            </a:r>
-          </a:p>
-        </p:txBody>
-      </p:sp>
-      <p:pic>
-        <p:nvPicPr>
-          <p:cNvPr id="7" name="Marcador de contenido 6">
-            <a:extLst>
-              <a:ext uri="{FF2B5EF4-FFF2-40B4-BE49-F238E27FC236}">
-                <a16:creationId xmlns:a16="http://schemas.microsoft.com/office/drawing/2014/main" id="{BFDD0C74-3BEF-42B5-9743-6C8045D122C9}"/>
-              </a:ext>
-            </a:extLst>
-          </p:cNvPr>
-          <p:cNvPicPr>
-            <a:picLocks noGrp="1" noChangeAspect="1"/>
-          </p:cNvPicPr>
-          <p:nvPr>
-            <p:ph idx="1"/>
-          </p:nvPr>
-        </p:nvPicPr>
-        <p:blipFill>
-          <a:blip r:embed="rId2"/>
-          <a:stretch>
-            <a:fillRect/>
-          </a:stretch>
-        </p:blipFill>
-        <p:spPr>
-          <a:xfrm>
-            <a:off x="2499458" y="2617788"/>
-            <a:ext cx="6073042" cy="4328744"/>
-          </a:xfrm>
-        </p:spPr>
-      </p:pic>
-      <p:pic>
-        <p:nvPicPr>
-          <p:cNvPr id="5" name="Imagen 4">
-            <a:extLst>
-              <a:ext uri="{FF2B5EF4-FFF2-40B4-BE49-F238E27FC236}">
-                <a16:creationId xmlns:a16="http://schemas.microsoft.com/office/drawing/2014/main" id="{CA733A05-0059-47C3-A701-8C3BEAE84686}"/>
-              </a:ext>
-            </a:extLst>
-          </p:cNvPr>
-          <p:cNvPicPr>
-            <a:picLocks noChangeAspect="1"/>
-          </p:cNvPicPr>
-          <p:nvPr/>
-        </p:nvPicPr>
-        <p:blipFill>
-          <a:blip r:embed="rId3"/>
-          <a:stretch>
-            <a:fillRect/>
-          </a:stretch>
-        </p:blipFill>
-        <p:spPr>
-          <a:xfrm>
-            <a:off x="1792929" y="1270000"/>
-            <a:ext cx="7772399" cy="1320800"/>
-          </a:xfrm>
-          <a:prstGeom prst="rect">
-            <a:avLst/>
-          </a:prstGeom>
-        </p:spPr>
-      </p:pic>
-    </p:spTree>
-    <p:extLst>
-      <p:ext uri="{BB962C8B-B14F-4D97-AF65-F5344CB8AC3E}">
-        <p14:creationId xmlns:p14="http://schemas.microsoft.com/office/powerpoint/2010/main" val="2483400178"/>
-      </p:ext>
-    </p:extLst>
-  </p:cSld>
-  <p:clrMapOvr>
-    <a:masterClrMapping/>
-  </p:clrMapOvr>
-</p:sld>
-</file>
-
-<file path=ppt/slides/slide32.xml><?xml version="1.0" encoding="utf-8"?>
-<p:sld xmlns:a="http://schemas.openxmlformats.org/drawingml/2006/main" xmlns:r="http://schemas.openxmlformats.org/officeDocument/2006/relationships" xmlns:p="http://schemas.openxmlformats.org/presentationml/2006/main">
-  <p:cSld>
-    <p:spTree>
-      <p:nvGrpSpPr>
-        <p:cNvPr id="1" name=""/>
-        <p:cNvGrpSpPr/>
-        <p:nvPr/>
-      </p:nvGrpSpPr>
-      <p:grpSpPr>
-        <a:xfrm>
-          <a:off x="0" y="0"/>
-          <a:ext cx="0" cy="0"/>
-          <a:chOff x="0" y="0"/>
-          <a:chExt cx="0" cy="0"/>
-        </a:xfrm>
-      </p:grpSpPr>
-      <p:sp>
-        <p:nvSpPr>
-          <p:cNvPr id="2" name="Título 1">
-            <a:extLst>
-              <a:ext uri="{FF2B5EF4-FFF2-40B4-BE49-F238E27FC236}">
-                <a16:creationId xmlns:a16="http://schemas.microsoft.com/office/drawing/2014/main" id="{4402FDC3-C1DE-401F-9FF1-4840A140B340}"/>
-              </a:ext>
-            </a:extLst>
-          </p:cNvPr>
-          <p:cNvSpPr>
-            <a:spLocks noGrp="1"/>
-          </p:cNvSpPr>
-          <p:nvPr>
-            <p:ph type="title"/>
-          </p:nvPr>
-        </p:nvSpPr>
-        <p:spPr/>
-        <p:txBody>
-          <a:bodyPr/>
-          <a:lstStyle/>
-          <a:p>
-            <a:r>
-              <a:rPr lang="es-AR" dirty="0"/>
-              <a:t>Barrido de frecuencias</a:t>
-            </a:r>
-          </a:p>
-        </p:txBody>
-      </p:sp>
-      <p:pic>
-        <p:nvPicPr>
-          <p:cNvPr id="5" name="Marcador de contenido 4">
-            <a:extLst>
-              <a:ext uri="{FF2B5EF4-FFF2-40B4-BE49-F238E27FC236}">
-                <a16:creationId xmlns:a16="http://schemas.microsoft.com/office/drawing/2014/main" id="{A8815EC7-10D8-4721-BC93-715563470ED8}"/>
-              </a:ext>
-            </a:extLst>
-          </p:cNvPr>
-          <p:cNvPicPr>
-            <a:picLocks noGrp="1" noChangeAspect="1"/>
-          </p:cNvPicPr>
-          <p:nvPr>
-            <p:ph idx="1"/>
-          </p:nvPr>
-        </p:nvPicPr>
-        <p:blipFill>
-          <a:blip r:embed="rId2"/>
-          <a:stretch>
-            <a:fillRect/>
-          </a:stretch>
-        </p:blipFill>
-        <p:spPr>
-          <a:xfrm>
-            <a:off x="1924908" y="1930400"/>
-            <a:ext cx="6972907" cy="4706507"/>
-          </a:xfrm>
-        </p:spPr>
-      </p:pic>
-    </p:spTree>
-    <p:extLst>
-      <p:ext uri="{BB962C8B-B14F-4D97-AF65-F5344CB8AC3E}">
-        <p14:creationId xmlns:p14="http://schemas.microsoft.com/office/powerpoint/2010/main" val="2379047892"/>
-      </p:ext>
-    </p:extLst>
-  </p:cSld>
-  <p:clrMapOvr>
-    <a:masterClrMapping/>
-  </p:clrMapOvr>
-</p:sld>
-</file>
-
-<file path=ppt/slides/slide33.xml><?xml version="1.0" encoding="utf-8"?>
-<p:sld xmlns:a="http://schemas.openxmlformats.org/drawingml/2006/main" xmlns:r="http://schemas.openxmlformats.org/officeDocument/2006/relationships" xmlns:p="http://schemas.openxmlformats.org/presentationml/2006/main">
-  <p:cSld>
-    <p:spTree>
-      <p:nvGrpSpPr>
-        <p:cNvPr id="1" name=""/>
-        <p:cNvGrpSpPr/>
-        <p:nvPr/>
-      </p:nvGrpSpPr>
-      <p:grpSpPr>
-        <a:xfrm>
-          <a:off x="0" y="0"/>
-          <a:ext cx="0" cy="0"/>
-          <a:chOff x="0" y="0"/>
-          <a:chExt cx="0" cy="0"/>
-        </a:xfrm>
-      </p:grpSpPr>
-      <p:sp>
-        <p:nvSpPr>
-          <p:cNvPr id="2" name="Título 1">
-            <a:extLst>
-              <a:ext uri="{FF2B5EF4-FFF2-40B4-BE49-F238E27FC236}">
-                <a16:creationId xmlns:a16="http://schemas.microsoft.com/office/drawing/2014/main" id="{B956DE61-992C-4D9E-A929-387D0E6E0A87}"/>
-              </a:ext>
-            </a:extLst>
-          </p:cNvPr>
-          <p:cNvSpPr>
-            <a:spLocks noGrp="1"/>
-          </p:cNvSpPr>
-          <p:nvPr>
-            <p:ph type="title"/>
-          </p:nvPr>
-        </p:nvSpPr>
-        <p:spPr/>
-        <p:txBody>
-          <a:bodyPr/>
-          <a:lstStyle/>
-          <a:p>
-            <a:r>
-              <a:rPr lang="es-AR" dirty="0"/>
-              <a:t>Conclusiones y posibles mejoras</a:t>
-            </a:r>
-          </a:p>
-        </p:txBody>
-      </p:sp>
-      <p:sp>
-        <p:nvSpPr>
-          <p:cNvPr id="3" name="Marcador de contenido 2">
-            <a:extLst>
-              <a:ext uri="{FF2B5EF4-FFF2-40B4-BE49-F238E27FC236}">
-                <a16:creationId xmlns:a16="http://schemas.microsoft.com/office/drawing/2014/main" id="{C7986D22-3D7D-48C6-B0EA-E77D6DE1F35B}"/>
-              </a:ext>
-            </a:extLst>
-          </p:cNvPr>
-          <p:cNvSpPr>
-            <a:spLocks noGrp="1"/>
-          </p:cNvSpPr>
-          <p:nvPr>
-            <p:ph idx="1"/>
-          </p:nvPr>
-        </p:nvSpPr>
-        <p:spPr/>
-        <p:txBody>
-          <a:bodyPr/>
-          <a:lstStyle/>
-          <a:p>
-            <a:endParaRPr lang="es-AR" dirty="0"/>
-          </a:p>
-        </p:txBody>
-      </p:sp>
-      <p:pic>
-        <p:nvPicPr>
-          <p:cNvPr id="5" name="Imagen 4">
-            <a:extLst>
-              <a:ext uri="{FF2B5EF4-FFF2-40B4-BE49-F238E27FC236}">
-                <a16:creationId xmlns:a16="http://schemas.microsoft.com/office/drawing/2014/main" id="{4F4EEEA0-EC78-4CA7-B423-A928124359A5}"/>
-              </a:ext>
-            </a:extLst>
-          </p:cNvPr>
-          <p:cNvPicPr>
-            <a:picLocks noChangeAspect="1"/>
-          </p:cNvPicPr>
-          <p:nvPr/>
-        </p:nvPicPr>
-        <p:blipFill>
-          <a:blip r:embed="rId2"/>
-          <a:stretch>
-            <a:fillRect/>
-          </a:stretch>
-        </p:blipFill>
-        <p:spPr>
-          <a:xfrm>
-            <a:off x="1225817" y="2204866"/>
-            <a:ext cx="8168204" cy="2722735"/>
-          </a:xfrm>
-          <a:prstGeom prst="rect">
-            <a:avLst/>
-          </a:prstGeom>
-        </p:spPr>
-      </p:pic>
-    </p:spTree>
-    <p:extLst>
-      <p:ext uri="{BB962C8B-B14F-4D97-AF65-F5344CB8AC3E}">
-        <p14:creationId xmlns:p14="http://schemas.microsoft.com/office/powerpoint/2010/main" val="3537097527"/>
-      </p:ext>
-    </p:extLst>
-  </p:cSld>
-  <p:clrMapOvr>
-    <a:masterClrMapping/>
-  </p:clrMapOvr>
-</p:sld>
-</file>
-
-<file path=ppt/slides/slide34.xml><?xml version="1.0" encoding="utf-8"?>
-<p:sld xmlns:a="http://schemas.openxmlformats.org/drawingml/2006/main" xmlns:r="http://schemas.openxmlformats.org/officeDocument/2006/relationships" xmlns:p="http://schemas.openxmlformats.org/presentationml/2006/main">
-  <p:cSld>
-    <p:spTree>
-      <p:nvGrpSpPr>
-        <p:cNvPr id="1" name=""/>
-        <p:cNvGrpSpPr/>
-        <p:nvPr/>
-      </p:nvGrpSpPr>
-      <p:grpSpPr>
-        <a:xfrm>
-          <a:off x="0" y="0"/>
-          <a:ext cx="0" cy="0"/>
-          <a:chOff x="0" y="0"/>
-          <a:chExt cx="0" cy="0"/>
-        </a:xfrm>
-      </p:grpSpPr>
-      <p:sp>
-        <p:nvSpPr>
-          <p:cNvPr id="4" name="Título 3">
-            <a:extLst>
-              <a:ext uri="{FF2B5EF4-FFF2-40B4-BE49-F238E27FC236}">
-                <a16:creationId xmlns:a16="http://schemas.microsoft.com/office/drawing/2014/main" id="{02A53883-E446-42D7-873D-F698C5F0D058}"/>
-              </a:ext>
-            </a:extLst>
-          </p:cNvPr>
-          <p:cNvSpPr>
-            <a:spLocks noGrp="1"/>
-          </p:cNvSpPr>
-          <p:nvPr>
-            <p:ph type="title"/>
-          </p:nvPr>
-        </p:nvSpPr>
-        <p:spPr>
-          <a:xfrm>
-            <a:off x="4334934" y="2992315"/>
-            <a:ext cx="8596668" cy="1320800"/>
-          </a:xfrm>
-        </p:spPr>
-        <p:txBody>
-          <a:bodyPr>
-            <a:normAutofit/>
-          </a:bodyPr>
-          <a:lstStyle/>
-          <a:p>
-            <a:r>
-              <a:rPr lang="es-AR" sz="5400" dirty="0"/>
-              <a:t>Gracias</a:t>
-            </a:r>
-          </a:p>
-        </p:txBody>
-      </p:sp>
-    </p:spTree>
-    <p:extLst>
-      <p:ext uri="{BB962C8B-B14F-4D97-AF65-F5344CB8AC3E}">
-        <p14:creationId xmlns:p14="http://schemas.microsoft.com/office/powerpoint/2010/main" val="537846595"/>
-      </p:ext>
-    </p:extLst>
-  </p:cSld>
-  <p:clrMapOvr>
-    <a:masterClrMapping/>
-  </p:clrMapOvr>
-</p:sld>
-</file>
-
-<file path=ppt/slides/slide4.xml><?xml version="1.0" encoding="utf-8"?>
+<file path=ppt/slides/slide7.xml><?xml version="1.0" encoding="utf-8"?>
 <p:sld xmlns:a="http://schemas.openxmlformats.org/drawingml/2006/main" xmlns:r="http://schemas.openxmlformats.org/officeDocument/2006/relationships" xmlns:p="http://schemas.openxmlformats.org/presentationml/2006/main">
   <p:cSld>
     <p:spTree>
@@ -9156,7 +9954,7 @@
 </p:sld>
 </file>
 
-<file path=ppt/slides/slide5.xml><?xml version="1.0" encoding="utf-8"?>
+<file path=ppt/slides/slide8.xml><?xml version="1.0" encoding="utf-8"?>
 <p:sld xmlns:a="http://schemas.openxmlformats.org/drawingml/2006/main" xmlns:r="http://schemas.openxmlformats.org/officeDocument/2006/relationships" xmlns:p="http://schemas.openxmlformats.org/presentationml/2006/main">
   <p:cSld>
     <p:spTree>
@@ -9304,7 +10102,7 @@
 </p:sld>
 </file>
 
-<file path=ppt/slides/slide6.xml><?xml version="1.0" encoding="utf-8"?>
+<file path=ppt/slides/slide9.xml><?xml version="1.0" encoding="utf-8"?>
 <p:sld xmlns:a="http://schemas.openxmlformats.org/drawingml/2006/main" xmlns:r="http://schemas.openxmlformats.org/officeDocument/2006/relationships" xmlns:p="http://schemas.openxmlformats.org/presentationml/2006/main">
   <p:cSld>
     <p:spTree>
@@ -9413,446 +10211,6 @@
     <p:extLst>
       <p:ext uri="{BB962C8B-B14F-4D97-AF65-F5344CB8AC3E}">
         <p14:creationId xmlns:p14="http://schemas.microsoft.com/office/powerpoint/2010/main" val="3042681368"/>
-      </p:ext>
-    </p:extLst>
-  </p:cSld>
-  <p:clrMapOvr>
-    <a:masterClrMapping/>
-  </p:clrMapOvr>
-</p:sld>
-</file>
-
-<file path=ppt/slides/slide7.xml><?xml version="1.0" encoding="utf-8"?>
-<p:sld xmlns:a="http://schemas.openxmlformats.org/drawingml/2006/main" xmlns:r="http://schemas.openxmlformats.org/officeDocument/2006/relationships" xmlns:p="http://schemas.openxmlformats.org/presentationml/2006/main">
-  <p:cSld>
-    <p:spTree>
-      <p:nvGrpSpPr>
-        <p:cNvPr id="1" name=""/>
-        <p:cNvGrpSpPr/>
-        <p:nvPr/>
-      </p:nvGrpSpPr>
-      <p:grpSpPr>
-        <a:xfrm>
-          <a:off x="0" y="0"/>
-          <a:ext cx="0" cy="0"/>
-          <a:chOff x="0" y="0"/>
-          <a:chExt cx="0" cy="0"/>
-        </a:xfrm>
-      </p:grpSpPr>
-      <p:sp>
-        <p:nvSpPr>
-          <p:cNvPr id="6" name="Título 5">
-            <a:extLst>
-              <a:ext uri="{FF2B5EF4-FFF2-40B4-BE49-F238E27FC236}">
-                <a16:creationId xmlns:a16="http://schemas.microsoft.com/office/drawing/2014/main" id="{1718A55E-07E3-466D-9E8B-6E8AA62B4424}"/>
-              </a:ext>
-            </a:extLst>
-          </p:cNvPr>
-          <p:cNvSpPr>
-            <a:spLocks noGrp="1"/>
-          </p:cNvSpPr>
-          <p:nvPr>
-            <p:ph type="title"/>
-          </p:nvPr>
-        </p:nvSpPr>
-        <p:spPr/>
-        <p:txBody>
-          <a:bodyPr/>
-          <a:lstStyle/>
-          <a:p>
-            <a:r>
-              <a:rPr lang="es-ES" dirty="0"/>
-              <a:t>Modelado lineal de la planta</a:t>
-            </a:r>
-            <a:endParaRPr lang="es-AR" dirty="0"/>
-          </a:p>
-        </p:txBody>
-      </p:sp>
-      <p:pic>
-        <p:nvPicPr>
-          <p:cNvPr id="16" name="Marcador de contenido 15">
-            <a:extLst>
-              <a:ext uri="{FF2B5EF4-FFF2-40B4-BE49-F238E27FC236}">
-                <a16:creationId xmlns:a16="http://schemas.microsoft.com/office/drawing/2014/main" id="{0B76AC21-542D-46B1-8895-17CB30EB9E6D}"/>
-              </a:ext>
-            </a:extLst>
-          </p:cNvPr>
-          <p:cNvPicPr>
-            <a:picLocks noGrp="1" noChangeAspect="1"/>
-          </p:cNvPicPr>
-          <p:nvPr>
-            <p:ph idx="1"/>
-          </p:nvPr>
-        </p:nvPicPr>
-        <p:blipFill>
-          <a:blip r:embed="rId2"/>
-          <a:stretch>
-            <a:fillRect/>
-          </a:stretch>
-        </p:blipFill>
-        <p:spPr>
-          <a:xfrm>
-            <a:off x="3163531" y="1560629"/>
-            <a:ext cx="4858428" cy="543001"/>
-          </a:xfrm>
-        </p:spPr>
-      </p:pic>
-      <p:pic>
-        <p:nvPicPr>
-          <p:cNvPr id="18" name="Imagen 17">
-            <a:extLst>
-              <a:ext uri="{FF2B5EF4-FFF2-40B4-BE49-F238E27FC236}">
-                <a16:creationId xmlns:a16="http://schemas.microsoft.com/office/drawing/2014/main" id="{29C2147A-0A4D-492D-A768-CDC63CFADF84}"/>
-              </a:ext>
-            </a:extLst>
-          </p:cNvPr>
-          <p:cNvPicPr>
-            <a:picLocks noChangeAspect="1"/>
-          </p:cNvPicPr>
-          <p:nvPr/>
-        </p:nvPicPr>
-        <p:blipFill>
-          <a:blip r:embed="rId3"/>
-          <a:stretch>
-            <a:fillRect/>
-          </a:stretch>
-        </p:blipFill>
-        <p:spPr>
-          <a:xfrm>
-            <a:off x="3558873" y="2276860"/>
-            <a:ext cx="4067743" cy="2067213"/>
-          </a:xfrm>
-          <a:prstGeom prst="rect">
-            <a:avLst/>
-          </a:prstGeom>
-        </p:spPr>
-      </p:pic>
-      <p:pic>
-        <p:nvPicPr>
-          <p:cNvPr id="20" name="Imagen 19">
-            <a:extLst>
-              <a:ext uri="{FF2B5EF4-FFF2-40B4-BE49-F238E27FC236}">
-                <a16:creationId xmlns:a16="http://schemas.microsoft.com/office/drawing/2014/main" id="{885687BA-DF3B-478D-BA52-ECEDCE1C3678}"/>
-              </a:ext>
-            </a:extLst>
-          </p:cNvPr>
-          <p:cNvPicPr>
-            <a:picLocks noChangeAspect="1"/>
-          </p:cNvPicPr>
-          <p:nvPr/>
-        </p:nvPicPr>
-        <p:blipFill>
-          <a:blip r:embed="rId4"/>
-          <a:stretch>
-            <a:fillRect/>
-          </a:stretch>
-        </p:blipFill>
-        <p:spPr>
-          <a:xfrm>
-            <a:off x="3849425" y="4517303"/>
-            <a:ext cx="3486637" cy="1933845"/>
-          </a:xfrm>
-          <a:prstGeom prst="rect">
-            <a:avLst/>
-          </a:prstGeom>
-        </p:spPr>
-      </p:pic>
-    </p:spTree>
-    <p:extLst>
-      <p:ext uri="{BB962C8B-B14F-4D97-AF65-F5344CB8AC3E}">
-        <p14:creationId xmlns:p14="http://schemas.microsoft.com/office/powerpoint/2010/main" val="4262677638"/>
-      </p:ext>
-    </p:extLst>
-  </p:cSld>
-  <p:clrMapOvr>
-    <a:masterClrMapping/>
-  </p:clrMapOvr>
-</p:sld>
-</file>
-
-<file path=ppt/slides/slide8.xml><?xml version="1.0" encoding="utf-8"?>
-<p:sld xmlns:a="http://schemas.openxmlformats.org/drawingml/2006/main" xmlns:r="http://schemas.openxmlformats.org/officeDocument/2006/relationships" xmlns:p="http://schemas.openxmlformats.org/presentationml/2006/main">
-  <p:cSld>
-    <p:spTree>
-      <p:nvGrpSpPr>
-        <p:cNvPr id="1" name=""/>
-        <p:cNvGrpSpPr/>
-        <p:nvPr/>
-      </p:nvGrpSpPr>
-      <p:grpSpPr>
-        <a:xfrm>
-          <a:off x="0" y="0"/>
-          <a:ext cx="0" cy="0"/>
-          <a:chOff x="0" y="0"/>
-          <a:chExt cx="0" cy="0"/>
-        </a:xfrm>
-      </p:grpSpPr>
-      <p:sp>
-        <p:nvSpPr>
-          <p:cNvPr id="2" name="Título 1">
-            <a:extLst>
-              <a:ext uri="{FF2B5EF4-FFF2-40B4-BE49-F238E27FC236}">
-                <a16:creationId xmlns:a16="http://schemas.microsoft.com/office/drawing/2014/main" id="{053947EB-2A12-4F67-80DD-5101525CF3B9}"/>
-              </a:ext>
-            </a:extLst>
-          </p:cNvPr>
-          <p:cNvSpPr>
-            <a:spLocks noGrp="1"/>
-          </p:cNvSpPr>
-          <p:nvPr>
-            <p:ph type="title"/>
-          </p:nvPr>
-        </p:nvSpPr>
-        <p:spPr/>
-        <p:txBody>
-          <a:bodyPr/>
-          <a:lstStyle/>
-          <a:p>
-            <a:r>
-              <a:rPr lang="es-ES" dirty="0"/>
-              <a:t>Modelado lineal de la planta</a:t>
-            </a:r>
-            <a:endParaRPr lang="es-AR" dirty="0"/>
-          </a:p>
-        </p:txBody>
-      </p:sp>
-      <p:sp>
-        <p:nvSpPr>
-          <p:cNvPr id="3" name="Marcador de contenido 2">
-            <a:extLst>
-              <a:ext uri="{FF2B5EF4-FFF2-40B4-BE49-F238E27FC236}">
-                <a16:creationId xmlns:a16="http://schemas.microsoft.com/office/drawing/2014/main" id="{FAF68963-1555-40EC-B5F1-8CF535108E92}"/>
-              </a:ext>
-            </a:extLst>
-          </p:cNvPr>
-          <p:cNvSpPr>
-            <a:spLocks noGrp="1"/>
-          </p:cNvSpPr>
-          <p:nvPr>
-            <p:ph idx="1"/>
-          </p:nvPr>
-        </p:nvSpPr>
-        <p:spPr/>
-        <p:txBody>
-          <a:bodyPr/>
-          <a:lstStyle/>
-          <a:p>
-            <a:endParaRPr lang="es-AR" dirty="0"/>
-          </a:p>
-        </p:txBody>
-      </p:sp>
-      <p:pic>
-        <p:nvPicPr>
-          <p:cNvPr id="7" name="Imagen 6">
-            <a:extLst>
-              <a:ext uri="{FF2B5EF4-FFF2-40B4-BE49-F238E27FC236}">
-                <a16:creationId xmlns:a16="http://schemas.microsoft.com/office/drawing/2014/main" id="{E2E19C63-78CF-4392-BA54-BB2B7EE5D29A}"/>
-              </a:ext>
-            </a:extLst>
-          </p:cNvPr>
-          <p:cNvPicPr>
-            <a:picLocks noChangeAspect="1"/>
-          </p:cNvPicPr>
-          <p:nvPr/>
-        </p:nvPicPr>
-        <p:blipFill>
-          <a:blip r:embed="rId2"/>
-          <a:stretch>
-            <a:fillRect/>
-          </a:stretch>
-        </p:blipFill>
-        <p:spPr>
-          <a:xfrm>
-            <a:off x="3086791" y="2921957"/>
-            <a:ext cx="4391638" cy="2105319"/>
-          </a:xfrm>
-          <a:prstGeom prst="rect">
-            <a:avLst/>
-          </a:prstGeom>
-        </p:spPr>
-      </p:pic>
-      <p:pic>
-        <p:nvPicPr>
-          <p:cNvPr id="9" name="Imagen 8">
-            <a:extLst>
-              <a:ext uri="{FF2B5EF4-FFF2-40B4-BE49-F238E27FC236}">
-                <a16:creationId xmlns:a16="http://schemas.microsoft.com/office/drawing/2014/main" id="{D274154C-EDE9-4DD3-9FCB-FC21D49D0203}"/>
-              </a:ext>
-            </a:extLst>
-          </p:cNvPr>
-          <p:cNvPicPr>
-            <a:picLocks noChangeAspect="1"/>
-          </p:cNvPicPr>
-          <p:nvPr/>
-        </p:nvPicPr>
-        <p:blipFill>
-          <a:blip r:embed="rId3"/>
-          <a:stretch>
-            <a:fillRect/>
-          </a:stretch>
-        </p:blipFill>
-        <p:spPr>
-          <a:xfrm>
-            <a:off x="3558344" y="2521851"/>
-            <a:ext cx="3448531" cy="400106"/>
-          </a:xfrm>
-          <a:prstGeom prst="rect">
-            <a:avLst/>
-          </a:prstGeom>
-        </p:spPr>
-      </p:pic>
-    </p:spTree>
-    <p:extLst>
-      <p:ext uri="{BB962C8B-B14F-4D97-AF65-F5344CB8AC3E}">
-        <p14:creationId xmlns:p14="http://schemas.microsoft.com/office/powerpoint/2010/main" val="1413790409"/>
-      </p:ext>
-    </p:extLst>
-  </p:cSld>
-  <p:clrMapOvr>
-    <a:masterClrMapping/>
-  </p:clrMapOvr>
-</p:sld>
-</file>
-
-<file path=ppt/slides/slide9.xml><?xml version="1.0" encoding="utf-8"?>
-<p:sld xmlns:a="http://schemas.openxmlformats.org/drawingml/2006/main" xmlns:r="http://schemas.openxmlformats.org/officeDocument/2006/relationships" xmlns:p="http://schemas.openxmlformats.org/presentationml/2006/main">
-  <p:cSld>
-    <p:spTree>
-      <p:nvGrpSpPr>
-        <p:cNvPr id="1" name=""/>
-        <p:cNvGrpSpPr/>
-        <p:nvPr/>
-      </p:nvGrpSpPr>
-      <p:grpSpPr>
-        <a:xfrm>
-          <a:off x="0" y="0"/>
-          <a:ext cx="0" cy="0"/>
-          <a:chOff x="0" y="0"/>
-          <a:chExt cx="0" cy="0"/>
-        </a:xfrm>
-      </p:grpSpPr>
-      <p:sp>
-        <p:nvSpPr>
-          <p:cNvPr id="2" name="Título 1">
-            <a:extLst>
-              <a:ext uri="{FF2B5EF4-FFF2-40B4-BE49-F238E27FC236}">
-                <a16:creationId xmlns:a16="http://schemas.microsoft.com/office/drawing/2014/main" id="{8F8F5C00-A3CC-43BD-94CD-9D768DDB8619}"/>
-              </a:ext>
-            </a:extLst>
-          </p:cNvPr>
-          <p:cNvSpPr>
-            <a:spLocks noGrp="1"/>
-          </p:cNvSpPr>
-          <p:nvPr>
-            <p:ph type="title"/>
-          </p:nvPr>
-        </p:nvSpPr>
-        <p:spPr/>
-        <p:txBody>
-          <a:bodyPr/>
-          <a:lstStyle/>
-          <a:p>
-            <a:r>
-              <a:rPr lang="es-ES" dirty="0"/>
-              <a:t>Modelado lineal de la planta</a:t>
-            </a:r>
-            <a:endParaRPr lang="es-AR" dirty="0"/>
-          </a:p>
-        </p:txBody>
-      </p:sp>
-      <p:pic>
-        <p:nvPicPr>
-          <p:cNvPr id="9" name="Marcador de contenido 8">
-            <a:extLst>
-              <a:ext uri="{FF2B5EF4-FFF2-40B4-BE49-F238E27FC236}">
-                <a16:creationId xmlns:a16="http://schemas.microsoft.com/office/drawing/2014/main" id="{D7C40D05-E4B2-4DCB-9983-D1DE425D2EE4}"/>
-              </a:ext>
-            </a:extLst>
-          </p:cNvPr>
-          <p:cNvPicPr>
-            <a:picLocks noGrp="1" noChangeAspect="1"/>
-          </p:cNvPicPr>
-          <p:nvPr>
-            <p:ph idx="1"/>
-          </p:nvPr>
-        </p:nvPicPr>
-        <p:blipFill>
-          <a:blip r:embed="rId2"/>
-          <a:stretch>
-            <a:fillRect/>
-          </a:stretch>
-        </p:blipFill>
-        <p:spPr>
-          <a:xfrm>
-            <a:off x="2754841" y="1270000"/>
-            <a:ext cx="6177492" cy="4633119"/>
-          </a:xfrm>
-        </p:spPr>
-      </p:pic>
-      <p:pic>
-        <p:nvPicPr>
-          <p:cNvPr id="7" name="Imagen 6">
-            <a:extLst>
-              <a:ext uri="{FF2B5EF4-FFF2-40B4-BE49-F238E27FC236}">
-                <a16:creationId xmlns:a16="http://schemas.microsoft.com/office/drawing/2014/main" id="{D1B664E1-FC85-46A8-8B0E-99104855087C}"/>
-              </a:ext>
-            </a:extLst>
-          </p:cNvPr>
-          <p:cNvPicPr>
-            <a:picLocks noChangeAspect="1"/>
-          </p:cNvPicPr>
-          <p:nvPr/>
-        </p:nvPicPr>
-        <p:blipFill>
-          <a:blip r:embed="rId3"/>
-          <a:stretch>
-            <a:fillRect/>
-          </a:stretch>
-        </p:blipFill>
-        <p:spPr>
-          <a:xfrm>
-            <a:off x="677334" y="2160589"/>
-            <a:ext cx="1571844" cy="962159"/>
-          </a:xfrm>
-          <a:prstGeom prst="rect">
-            <a:avLst/>
-          </a:prstGeom>
-        </p:spPr>
-      </p:pic>
-      <p:pic>
-        <p:nvPicPr>
-          <p:cNvPr id="13" name="Imagen 12">
-            <a:extLst>
-              <a:ext uri="{FF2B5EF4-FFF2-40B4-BE49-F238E27FC236}">
-                <a16:creationId xmlns:a16="http://schemas.microsoft.com/office/drawing/2014/main" id="{C61E7595-9519-44D0-ADF2-A8611BAD54A5}"/>
-              </a:ext>
-            </a:extLst>
-          </p:cNvPr>
-          <p:cNvPicPr>
-            <a:picLocks noChangeAspect="1"/>
-          </p:cNvPicPr>
-          <p:nvPr/>
-        </p:nvPicPr>
-        <p:blipFill>
-          <a:blip r:embed="rId4"/>
-          <a:stretch>
-            <a:fillRect/>
-          </a:stretch>
-        </p:blipFill>
-        <p:spPr>
-          <a:xfrm>
-            <a:off x="3054500" y="6043584"/>
-            <a:ext cx="5439534" cy="409632"/>
-          </a:xfrm>
-          <a:prstGeom prst="rect">
-            <a:avLst/>
-          </a:prstGeom>
-        </p:spPr>
-      </p:pic>
-    </p:spTree>
-    <p:extLst>
-      <p:ext uri="{BB962C8B-B14F-4D97-AF65-F5344CB8AC3E}">
-        <p14:creationId xmlns:p14="http://schemas.microsoft.com/office/powerpoint/2010/main" val="1052121241"/>
       </p:ext>
     </p:extLst>
   </p:cSld>
